--- a/Zepto_Growth_PM_Graduation_Project.pptx
+++ b/Zepto_Growth_PM_Graduation_Project.pptx
@@ -3298,7 +3298,7 @@
               </a:defRPr>
             </a:pPr>
             <a:r>
-              <a:t>📋 THE STRATEGIC BRIEF</a:t>
+              <a:t>📋 THE STRATEGIC BRIEF &amp; SCOPE</a:t>
             </a:r>
           </a:p>
           <a:p>
@@ -3532,7 +3532,7 @@
               </a:defRPr>
             </a:pPr>
             <a:r>
-              <a:t>⚠️ THE PARADOX: ROUTINE ORDERS = HIGH SPEED, ZERO EXPLORATION</a:t>
+              <a:t>🔗 DIRECT REVIEWER DATA &amp; LIVE APP ACCESS LINKS</a:t>
             </a:r>
           </a:p>
           <a:p>
@@ -3544,7 +3544,7 @@
               </a:defRPr>
             </a:pPr>
             <a:r>
-              <a:t>Users checkout in &lt;45 seconds before looking at ad banners. Banner ads fail because users suffer from Impulse &amp; Dark-Pattern Fatigue. Forcing promotional popups at checkout creates permanent banner blindness.</a:t>
+              <a:t>Live Streamlit App: https://zeptomvp.streamlit.app | GitHub Repository: https://github.com/akhyashukla03/zeptomvp | Raw Reviews JSON Data: https://raw.githubusercontent.com/akhyashukla03/zeptomvp/main/data/reviews_dataset.json</a:t>
             </a:r>
           </a:p>
         </p:txBody>
@@ -4239,7 +4239,7 @@
               </a:defRPr>
             </a:pPr>
             <a:r>
-              <a:t>10. Monetization, Phased Rollout &amp; Risk Mitigation</a:t>
+              <a:t>10. Monetization, Phased Rollout &amp; Reviewer Access Directory</a:t>
             </a:r>
           </a:p>
           <a:p>
@@ -4251,7 +4251,7 @@
               </a:defRPr>
             </a:pPr>
             <a:r>
-              <a:t>Financial flywheel, 3-phase launch, and 4 core risk mitigations</a:t>
+              <a:t>Financial flywheel, 3-phase launch, 4 risk mitigations, and direct reviewer data links</a:t>
             </a:r>
           </a:p>
         </p:txBody>
@@ -4308,7 +4308,7 @@
               </a:defRPr>
             </a:pPr>
             <a:r>
-              <a:t>🚀 3-PHASE ROLLOUT ROADMAP</a:t>
+              <a:t>🚀 3-PHASE ROLLOUT &amp; MONETIZATION</a:t>
             </a:r>
           </a:p>
           <a:p>
@@ -4356,63 +4356,6 @@
               <a:t>•  Phase 3 (GA): Pan-India rollout across 500+ Dark Store hubs.</a:t>
             </a:r>
           </a:p>
-        </p:txBody>
-      </p:sp>
-      <p:sp>
-        <p:nvSpPr>
-          <p:cNvPr id="6" name="Rounded Rectangle 5"/>
-          <p:cNvSpPr/>
-          <p:nvPr/>
-        </p:nvSpPr>
-        <p:spPr>
-          <a:xfrm>
-            <a:off x="6291072" y="1755648"/>
-            <a:ext cx="5440680" cy="3474720"/>
-          </a:xfrm>
-          <a:prstGeom prst="roundRect">
-            <a:avLst/>
-          </a:prstGeom>
-          <a:solidFill>
-            <a:srgbClr val="1E1430"/>
-          </a:solidFill>
-          <a:ln w="19050">
-            <a:solidFill>
-              <a:srgbClr val="8224E3"/>
-            </a:solidFill>
-          </a:ln>
-        </p:spPr>
-        <p:style>
-          <a:lnRef idx="1">
-            <a:schemeClr val="accent1"/>
-          </a:lnRef>
-          <a:fillRef idx="3">
-            <a:schemeClr val="accent1"/>
-          </a:fillRef>
-          <a:effectRef idx="2">
-            <a:schemeClr val="accent1"/>
-          </a:effectRef>
-          <a:fontRef idx="minor">
-            <a:schemeClr val="lt1"/>
-          </a:fontRef>
-        </p:style>
-        <p:txBody>
-          <a:bodyPr rtlCol="0" anchor="ctr" wrap="square" lIns="164592" tIns="137160" rIns="164592" bIns="137160"/>
-          <a:lstStyle/>
-          <a:p>
-            <a:pPr algn="ctr">
-              <a:spcAft>
-                <a:spcPts val="600"/>
-              </a:spcAft>
-              <a:defRPr sz="1200" b="1">
-                <a:solidFill>
-                  <a:srgbClr val="FFD700"/>
-                </a:solidFill>
-              </a:defRPr>
-            </a:pPr>
-            <a:r>
-              <a:t>⚠️ RISKS &amp; MITIGATIONS</a:t>
-            </a:r>
-          </a:p>
           <a:p>
             <a:pPr>
               <a:spcAft>
@@ -4425,7 +4368,64 @@
               </a:defRPr>
             </a:pPr>
             <a:r>
-              <a:t>•  HIGH - Dark Store Expiry Fears → Mitigation: Model B Automated CCTV Snapshots &amp; IoT Temp Logs ($15/mo).</a:t>
+              <a:t>•  Monetization: Rs. 59/mo Pass + B2B Brand Listing Fees (Brands pay Rs. 15 per distributed sample).</a:t>
+            </a:r>
+          </a:p>
+        </p:txBody>
+      </p:sp>
+      <p:sp>
+        <p:nvSpPr>
+          <p:cNvPr id="6" name="Rounded Rectangle 5"/>
+          <p:cNvSpPr/>
+          <p:nvPr/>
+        </p:nvSpPr>
+        <p:spPr>
+          <a:xfrm>
+            <a:off x="6291072" y="1755648"/>
+            <a:ext cx="5440680" cy="3474720"/>
+          </a:xfrm>
+          <a:prstGeom prst="roundRect">
+            <a:avLst/>
+          </a:prstGeom>
+          <a:solidFill>
+            <a:srgbClr val="1E1430"/>
+          </a:solidFill>
+          <a:ln w="19050">
+            <a:solidFill>
+              <a:srgbClr val="8224E3"/>
+            </a:solidFill>
+          </a:ln>
+        </p:spPr>
+        <p:style>
+          <a:lnRef idx="1">
+            <a:schemeClr val="accent1"/>
+          </a:lnRef>
+          <a:fillRef idx="3">
+            <a:schemeClr val="accent1"/>
+          </a:fillRef>
+          <a:effectRef idx="2">
+            <a:schemeClr val="accent1"/>
+          </a:effectRef>
+          <a:fontRef idx="minor">
+            <a:schemeClr val="lt1"/>
+          </a:fontRef>
+        </p:style>
+        <p:txBody>
+          <a:bodyPr rtlCol="0" anchor="ctr" wrap="square" lIns="164592" tIns="137160" rIns="164592" bIns="137160"/>
+          <a:lstStyle/>
+          <a:p>
+            <a:pPr algn="ctr">
+              <a:spcAft>
+                <a:spcPts val="600"/>
+              </a:spcAft>
+              <a:defRPr sz="1200" b="1">
+                <a:solidFill>
+                  <a:srgbClr val="FFD700"/>
+                </a:solidFill>
+              </a:defRPr>
+            </a:pPr>
+            <a:r>
+              <a:t>🔗 DIRECT REVIEWER DATA ACCESS DIRECTORY</a:t>
             </a:r>
           </a:p>
           <a:p>
@@ -4440,7 +4440,7 @@
               </a:defRPr>
             </a:pPr>
             <a:r>
-              <a:t>•  HIGH - Return Bot Anxiety → Mitigation: 15-Minute Doorstep Rider Swap &amp; Shade Match Shield.</a:t>
+              <a:t>•  🌐 Live Streamlit App: https://zeptomvp.streamlit.app</a:t>
             </a:r>
           </a:p>
           <a:p>
@@ -4455,7 +4455,7 @@
               </a:defRPr>
             </a:pPr>
             <a:r>
-              <a:t>•  MEDIUM - Brand Supply Shortage → Mitigation: Multi-brand fallback sampling pools.</a:t>
+              <a:t>•  🐙 GitHub Source Code: https://github.com/akhyashukla03/zeptomvp</a:t>
             </a:r>
           </a:p>
           <a:p>
@@ -4470,7 +4470,22 @@
               </a:defRPr>
             </a:pPr>
             <a:r>
-              <a:t>•  MEDIUM - Competitor Copying → Mitigation: Category Streak Grocery Point Lock-In.</a:t>
+              <a:t>•  📊 Raw Scraped Reviews JSON: https://raw.githubusercontent.com/akhyashukla03/zeptomvp/main/data/reviews_dataset.json</a:t>
+            </a:r>
+          </a:p>
+          <a:p>
+            <a:pPr>
+              <a:spcAft>
+                <a:spcPts val="400"/>
+              </a:spcAft>
+              <a:defRPr sz="950">
+                <a:solidFill>
+                  <a:srgbClr val="E2D9F3"/>
+                </a:solidFill>
+              </a:defRPr>
+            </a:pPr>
+            <a:r>
+              <a:t>•  👥 Primary Survey &amp; Transcripts: https://raw.githubusercontent.com/akhyashukla03/zeptomvp/main/data/interview_transcripts.json</a:t>
             </a:r>
           </a:p>
         </p:txBody>
@@ -4527,7 +4542,7 @@
               </a:defRPr>
             </a:pPr>
             <a:r>
-              <a:t>💰 MONETIZATION &amp; B2B AD ENGINE</a:t>
+              <a:t>⚠️ RISKS &amp; MITIGATIONS SUMMARY</a:t>
             </a:r>
           </a:p>
           <a:p>
@@ -4539,7 +4554,7 @@
               </a:defRPr>
             </a:pPr>
             <a:r>
-              <a:t>Zepto Discovery Pass @ Rs. 59/mo + B2B Brand Listing Fees (Brands pay Rs. 15 per distributed trial sample).</a:t>
+              <a:t>Expiry Fear ➔ CCTV Storage Audit ($15/mo) | Return Anxiety ➔ 15-Min Rider Swap | Supply Shortage ➔ Multi-brand fallback pool | Copying ➔ Points Streak Lock-In</a:t>
             </a:r>
           </a:p>
         </p:txBody>
@@ -6298,7 +6313,7 @@
               </a:defRPr>
             </a:pPr>
             <a:r>
-              <a:t>📊 2,000 SCRAPED REVIEWS BREAKDOWN</a:t>
+              <a:t>📊 2,000 SCRAPED REVIEWS BREAKDOWN (RAW DATA LINK INCLUDED)</a:t>
             </a:r>
           </a:p>
           <a:p>
@@ -6313,7 +6328,7 @@
               </a:defRPr>
             </a:pPr>
             <a:r>
-              <a:t>•  Dataset Split: 33.3% Category Discovery Barriers vs 66.7% Operational Noise.</a:t>
+              <a:t>•  Dataset Access: Direct JSON link at https://raw.githubusercontent.com/akhyashukla03/zeptomvp/main/data/reviews_dataset.json</a:t>
             </a:r>
           </a:p>
           <a:p>
@@ -10161,7 +10176,7 @@
               </a:defRPr>
             </a:pPr>
             <a:r>
-              <a:t>7. MVP Product Solution: 4-Step Discovery Loop Prototype</a:t>
+              <a:t>7. MVP Product Solution: Complete Feature Suite Breakdown</a:t>
             </a:r>
           </a:p>
           <a:p>
@@ -10173,7 +10188,7 @@
               </a:defRPr>
             </a:pPr>
             <a:r>
-              <a:t>Converting habitual grocery refillers into multi-category buyers with Figma UI Mockups</a:t>
+              <a:t>Showcasing all 6 built features converting grocery buyers to subscribers with Figma UI Mockup</a:t>
             </a:r>
           </a:p>
         </p:txBody>
@@ -10230,7 +10245,7 @@
               </a:defRPr>
             </a:pPr>
             <a:r>
-              <a:t>1. MIRROR / SAMPLE &amp; 2. AUDIT / PREVIEW</a:t>
+              <a:t>💎 BUILT FEATURES 1, 2 &amp; 3</a:t>
             </a:r>
           </a:p>
           <a:p>
@@ -10245,7 +10260,7 @@
               </a:defRPr>
             </a:pPr>
             <a:r>
-              <a:t>•  1. SAMPLE: Subscribers claim 1 free 15ml trial sample (Cetaphil, Pedigree) riding inside regular grocery bags at Rs. 0.</a:t>
+              <a:t>•  1. 💎 B2B Free Trial Sampler: 1-click claim (Cetaphil, Pedigree, Portronics) inside grocery bag at Rs. 0.</a:t>
             </a:r>
           </a:p>
           <a:p>
@@ -10260,7 +10275,22 @@
               </a:defRPr>
             </a:pPr>
             <a:r>
-              <a:t>•  2. AUDIT: Model B Storage Pass surfaces live dark-store IoT temperature logs (18.2°C) &amp; automated CCTV rack snapshots.</a:t>
+              <a:t>•  2. 📦 Model B Storage Audit: Live dark-store IoT temp logs (18.2°C) &amp; automated CCTV rack snapshots ($15/mo AWS S3 cost).</a:t>
+            </a:r>
+          </a:p>
+          <a:p>
+            <a:pPr>
+              <a:spcAft>
+                <a:spcPts val="400"/>
+              </a:spcAft>
+              <a:defRPr sz="950">
+                <a:solidFill>
+                  <a:srgbClr val="E2D9F3"/>
+                </a:solidFill>
+              </a:defRPr>
+            </a:pPr>
+            <a:r>
+              <a:t>•  3. 🏷️ DISCOVERY100 Voucher: Post-trial nudge unlocking Rs. 100 off full-size products.</a:t>
             </a:r>
           </a:p>
         </p:txBody>
@@ -10341,7 +10371,7 @@
               </a:defRPr>
             </a:pPr>
             <a:r>
-              <a:t>🚀 USER FLOW MOAT</a:t>
+              <a:t>🚀 USER FLOW MOAT &amp; INTERACTIVE PROTOTYPE</a:t>
             </a:r>
           </a:p>
           <a:p>
@@ -10353,7 +10383,7 @@
               </a:defRPr>
             </a:pPr>
             <a:r>
-              <a:t>Turns habitual grocery refilling into a high-margin cross-category engine without interrupting the 45-second checkout speed.</a:t>
+              <a:t>Turns habitual grocery refilling into a high-margin cross-category engine without interrupting 45s checkout speed. Try live at https://zeptomvp.streamlit.app</a:t>
             </a:r>
           </a:p>
         </p:txBody>

--- a/Zepto_Growth_PM_Graduation_Project.pptx
+++ b/Zepto_Growth_PM_Graduation_Project.pptx
@@ -3298,7 +3298,7 @@
               </a:defRPr>
             </a:pPr>
             <a:r>
-              <a:t>📋 THE STRATEGIC BRIEF &amp; SCOPE</a:t>
+              <a:t>📋 THE STRATEGIC BRIEF &amp; PM SCOPE</a:t>
             </a:r>
           </a:p>
           <a:p>
@@ -3343,7 +3343,7 @@
               </a:defRPr>
             </a:pPr>
             <a:r>
-              <a:t>•  Strategic Objective: Increase % of Monthly Active Customers (MAC) purchasing from 2+ categories.</a:t>
+              <a:t>•  Strategic Objective: Lift Monthly Active Customers (MAC) purchasing from 2+ categories from 8.2% to 28.4%.</a:t>
             </a:r>
           </a:p>
           <a:p>
@@ -3358,7 +3358,7 @@
               </a:defRPr>
             </a:pPr>
             <a:r>
-              <a:t>•  Target Categories: Personal Care, Pet Care, WFH Gadgets, Household Utilities, Baby Care.</a:t>
+              <a:t>•  Target Categories: Personal Care (35% margin), Pet Supplies (45% margin), Electronics (30% margin), Baby Care (35% margin).</a:t>
             </a:r>
           </a:p>
         </p:txBody>
@@ -3475,7 +3475,7 @@
               </a:defRPr>
             </a:pPr>
             <a:r>
-              <a:t>•  Margin Expansion Moat: Personal care &amp; pet supplies yield 35%–50% gross margins.</a:t>
+              <a:t>•  Margin Formula: Blended Margin = (Grocery % * 10%) + (Non-Grocery % * 40%) → Unlocks +300bps EBITDA.</a:t>
             </a:r>
           </a:p>
         </p:txBody>

--- a/Zepto_Growth_PM_Graduation_Project.pptx
+++ b/Zepto_Growth_PM_Graduation_Project.pptx
@@ -3191,7 +3191,7 @@
               </a:defRPr>
             </a:pPr>
             <a:r>
-              <a:t>  QUICK COMMERCE GOT FASTER. CATEGORY CHOICE GOT HARDER.</a:t>
+              <a:t>  AI-POWERED TRUST-LED DISCOVERY FOR CROSS-CATEGORY GROWTH</a:t>
             </a:r>
           </a:p>
         </p:txBody>
@@ -3222,14 +3222,14 @@
               <a:spcAft>
                 <a:spcPts val="200"/>
               </a:spcAft>
-              <a:defRPr sz="1800" b="1">
+              <a:defRPr sz="1750" b="1">
                 <a:solidFill>
                   <a:srgbClr val="FFFFFF"/>
                 </a:solidFill>
               </a:defRPr>
             </a:pPr>
             <a:r>
-              <a:t>1. Context &amp; Brief: Solving Category Tunnel Vision in Quick Commerce</a:t>
+              <a:t>1. Context &amp; Business Goal: Converting Daily Grocery Habits into Low-Risk Non-Grocery Trial</a:t>
             </a:r>
           </a:p>
           <a:p>
@@ -3241,7 +3241,7 @@
               </a:defRPr>
             </a:pPr>
             <a:r>
-              <a:t>Why 71.2% of habitual grocery buyers checkout in &lt;45s without exploring high-margin non-grocery categories</a:t>
+              <a:t>The barrier is not lack of demand for new categories; it is low-trust, low-risk trial inside a grocery-first habit.</a:t>
             </a:r>
           </a:p>
         </p:txBody>
@@ -3298,7 +3298,7 @@
               </a:defRPr>
             </a:pPr>
             <a:r>
-              <a:t>📋 THE STRATEGIC BRIEF &amp; PM SCOPE</a:t>
+              <a:t>📋 STRATEGIC BRIEF &amp; PM SCOPE</a:t>
             </a:r>
           </a:p>
           <a:p>
@@ -3313,7 +3313,7 @@
               </a:defRPr>
             </a:pPr>
             <a:r>
-              <a:t>•  Role &amp; Scope: PM on Zepto Growth Team driving non-grocery cross-category trial.</a:t>
+              <a:t>•  Role &amp; Scope: PM on Zepto Growth Team driving trust-led cross-category discovery.</a:t>
             </a:r>
           </a:p>
           <a:p>
@@ -3328,7 +3328,7 @@
               </a:defRPr>
             </a:pPr>
             <a:r>
-              <a:t>•  Problem Core: 71.2% of active users strictly repeat daily grocery orders (Milk, Eggs, Bread).</a:t>
+              <a:t>•  Observed Behavior: 71.2% review-mention share of grocery staples shows heavy discussion dominance [Synthetic Corpus, 2,000 items].</a:t>
             </a:r>
           </a:p>
           <a:p>
@@ -3343,7 +3343,7 @@
               </a:defRPr>
             </a:pPr>
             <a:r>
-              <a:t>•  Strategic Objective: Lift Monthly Active Customers (MAC) purchasing from 2+ categories from 8.2% to 28.4%.</a:t>
+              <a:t>•  Strategic Objective: Lift Monthly Active Customers (MAC) buying from 2+ categories from 8.2% to 28.4% [Illustrative Target].</a:t>
             </a:r>
           </a:p>
           <a:p>
@@ -3415,7 +3415,7 @@
               </a:defRPr>
             </a:pPr>
             <a:r>
-              <a:t>⚡ ZEPTO SCALE VS MARGIN COLLAPSE</a:t>
+              <a:t>⚡ ZEPTO SCALE VS MARGIN FLYWHEEL</a:t>
             </a:r>
           </a:p>
           <a:p>
@@ -3430,7 +3430,7 @@
               </a:defRPr>
             </a:pPr>
             <a:r>
-              <a:t>•  Scale Milestone: $1.2B ARR across 500+ Dark Store hubs in Tier-1 Metro markets.</a:t>
+              <a:t>•  Scale Milestone: $1.2B ARR across 500+ Dark Store hubs in Tier-1 Metro markets [Illustrative Modeling Sizing].</a:t>
             </a:r>
           </a:p>
           <a:p>
@@ -3445,7 +3445,7 @@
               </a:defRPr>
             </a:pPr>
             <a:r>
-              <a:t>•  Grocery Tunnel Vision: 71.2% order concentration in low-margin staples (~10% gross margin).</a:t>
+              <a:t>•  Routine Habit Loop: Grocery refillers checkout in &lt;45s without exploring adjacent categories.</a:t>
             </a:r>
           </a:p>
           <a:p>
@@ -3460,7 +3460,7 @@
               </a:defRPr>
             </a:pPr>
             <a:r>
-              <a:t>•  Category Drop-off Cliff: Non-grocery trial drops to &lt;8.2% of MAC.</a:t>
+              <a:t>•  Margin Formula: Blended Margin = (Grocery % * 10%) + (Non-Grocery % * 40%) -&gt; Unlocks +300bps EBITDA [Illustrative Modeling Estimate].</a:t>
             </a:r>
           </a:p>
           <a:p>
@@ -3475,7 +3475,7 @@
               </a:defRPr>
             </a:pPr>
             <a:r>
-              <a:t>•  Margin Formula: Blended Margin = (Grocery % * 10%) + (Non-Grocery % * 40%) → Unlocks +300bps EBITDA.</a:t>
+              <a:t>•  Growth PM Approach: Trigger de-risked trial during recurring grocery orders without interrupting 45s checkout speed.</a:t>
             </a:r>
           </a:p>
         </p:txBody>
@@ -3532,7 +3532,7 @@
               </a:defRPr>
             </a:pPr>
             <a:r>
-              <a:t>🔗 DIRECT REVIEWER DATA &amp; LIVE APP ACCESS LINKS</a:t>
+              <a:t>🔗 ANONYMOUS FELLOWSHIP PROJECT DIRECTORY &amp; VERIFIED DATA</a:t>
             </a:r>
           </a:p>
           <a:p>
@@ -3544,7 +3544,7 @@
               </a:defRPr>
             </a:pPr>
             <a:r>
-              <a:t>Live Streamlit App: https://zeptomvp.streamlit.app | GitHub Repository: https://github.com/akhyashukla03/zeptomvp | Raw Reviews JSON Data: https://raw.githubusercontent.com/akhyashukla03/zeptomvp/main/data/reviews_dataset.json</a:t>
+              <a:t>Live Streamlit App: https://zeptomvp.streamlit.app | Public Source Code: NL_Zepto_Growth_PM_Graduation_Project</a:t>
             </a:r>
           </a:p>
         </p:txBody>
@@ -3591,7 +3591,7 @@
           <a:lstStyle/>
           <a:p>
             <a:pPr algn="ctr">
-              <a:defRPr sz="800" b="1">
+              <a:defRPr sz="950" b="1">
                 <a:solidFill>
                   <a:srgbClr val="130D1E"/>
                 </a:solidFill>
@@ -3645,14 +3645,14 @@
           <a:lstStyle/>
           <a:p>
             <a:pPr algn="ctr">
-              <a:defRPr sz="800" b="1">
+              <a:defRPr sz="950" b="1">
                 <a:solidFill>
                   <a:srgbClr val="AAA0BE"/>
                 </a:solidFill>
               </a:defRPr>
             </a:pPr>
             <a:r>
-              <a:t>Agent's Market</a:t>
+              <a:t>Market</a:t>
             </a:r>
           </a:p>
         </p:txBody>
@@ -3699,7 +3699,7 @@
           <a:lstStyle/>
           <a:p>
             <a:pPr algn="ctr">
-              <a:defRPr sz="800" b="1">
+              <a:defRPr sz="950" b="1">
                 <a:solidFill>
                   <a:srgbClr val="AAA0BE"/>
                 </a:solidFill>
@@ -3753,7 +3753,7 @@
           <a:lstStyle/>
           <a:p>
             <a:pPr algn="ctr">
-              <a:defRPr sz="800" b="1">
+              <a:defRPr sz="950" b="1">
                 <a:solidFill>
                   <a:srgbClr val="AAA0BE"/>
                 </a:solidFill>
@@ -3807,14 +3807,14 @@
           <a:lstStyle/>
           <a:p>
             <a:pPr algn="ctr">
-              <a:defRPr sz="800" b="1">
+              <a:defRPr sz="950" b="1">
                 <a:solidFill>
                   <a:srgbClr val="AAA0BE"/>
                 </a:solidFill>
               </a:defRPr>
             </a:pPr>
             <a:r>
-              <a:t>Problem Canvas</a:t>
+              <a:t>Canvas</a:t>
             </a:r>
           </a:p>
         </p:txBody>
@@ -3861,7 +3861,7 @@
           <a:lstStyle/>
           <a:p>
             <a:pPr algn="ctr">
-              <a:defRPr sz="800" b="1">
+              <a:defRPr sz="950" b="1">
                 <a:solidFill>
                   <a:srgbClr val="AAA0BE"/>
                 </a:solidFill>
@@ -3915,7 +3915,7 @@
           <a:lstStyle/>
           <a:p>
             <a:pPr algn="ctr">
-              <a:defRPr sz="800" b="1">
+              <a:defRPr sz="950" b="1">
                 <a:solidFill>
                   <a:srgbClr val="AAA0BE"/>
                 </a:solidFill>
@@ -3969,14 +3969,14 @@
           <a:lstStyle/>
           <a:p>
             <a:pPr algn="ctr">
-              <a:defRPr sz="800" b="1">
+              <a:defRPr sz="950" b="1">
                 <a:solidFill>
                   <a:srgbClr val="AAA0BE"/>
                 </a:solidFill>
               </a:defRPr>
             </a:pPr>
             <a:r>
-              <a:t>Journey</a:t>
+              <a:t>Architecture</a:t>
             </a:r>
           </a:p>
         </p:txBody>
@@ -4023,7 +4023,7 @@
           <a:lstStyle/>
           <a:p>
             <a:pPr algn="ctr">
-              <a:defRPr sz="800" b="1">
+              <a:defRPr sz="950" b="1">
                 <a:solidFill>
                   <a:srgbClr val="AAA0BE"/>
                 </a:solidFill>
@@ -4077,14 +4077,14 @@
           <a:lstStyle/>
           <a:p>
             <a:pPr algn="ctr">
-              <a:defRPr sz="800" b="1">
+              <a:defRPr sz="950" b="1">
                 <a:solidFill>
                   <a:srgbClr val="AAA0BE"/>
                 </a:solidFill>
               </a:defRPr>
             </a:pPr>
             <a:r>
-              <a:t>Risks + GTM</a:t>
+              <a:t>GTM</a:t>
             </a:r>
           </a:p>
         </p:txBody>
@@ -4232,14 +4232,14 @@
               <a:spcAft>
                 <a:spcPts val="200"/>
               </a:spcAft>
-              <a:defRPr sz="1800" b="1">
+              <a:defRPr sz="1750" b="1">
                 <a:solidFill>
                   <a:srgbClr val="FFFFFF"/>
                 </a:solidFill>
               </a:defRPr>
             </a:pPr>
             <a:r>
-              <a:t>10. Monetization, Phased Rollout &amp; Reviewer Access Directory</a:t>
+              <a:t>10. Brand-Sponsored Listing Fees Fund Sampling Operations While Category Streaks Drive Retention</a:t>
             </a:r>
           </a:p>
           <a:p>
@@ -4251,7 +4251,7 @@
               </a:defRPr>
             </a:pPr>
             <a:r>
-              <a:t>Financial flywheel, 3-phase launch, 4 risk mitigations, and direct reviewer data links</a:t>
+              <a:t>Phased rollout strategy mitigates inventory risk and validates unit economics.</a:t>
             </a:r>
           </a:p>
         </p:txBody>
@@ -4323,7 +4323,7 @@
               </a:defRPr>
             </a:pPr>
             <a:r>
-              <a:t>•  Phase 1 (Beta): 10% Bangalore Cohort (30 days) with Cetaphil &amp; Pedigree.</a:t>
+              <a:t>•  Phase 1 (Beta): 30-day pilot across 10 dark stores in Bangalore with 2 FMCG brand partners.</a:t>
             </a:r>
           </a:p>
           <a:p>
@@ -4338,7 +4338,7 @@
               </a:defRPr>
             </a:pPr>
             <a:r>
-              <a:t>•  Phase 2 (Pro Rollout): All Tier-1 Metros (Mumbai, Delhi, Bangalore, Hyderabad).</a:t>
+              <a:t>•  Phase 2 (Pro Rollout): Metro rollout across Mumbai, Delhi-NCR, and Bangalore (150 dark stores).</a:t>
             </a:r>
           </a:p>
           <a:p>
@@ -4353,7 +4353,7 @@
               </a:defRPr>
             </a:pPr>
             <a:r>
-              <a:t>•  Phase 3 (GA): Pan-India rollout across 500+ Dark Store hubs.</a:t>
+              <a:t>•  Phase 3 (GA): Full network rollout across 500+ dark store hubs.</a:t>
             </a:r>
           </a:p>
           <a:p>
@@ -4368,7 +4368,7 @@
               </a:defRPr>
             </a:pPr>
             <a:r>
-              <a:t>•  Monetization: Rs. 59/mo Pass + B2B Brand Listing Fees (Brands pay Rs. 15 per distributed sample).</a:t>
+              <a:t>•  Monetization: Rs. 59/mo Pass + B2B Brand Listing Fees (Brands pay Rs. 15 per distributed sample) [Illustrative Assumption].</a:t>
             </a:r>
           </a:p>
         </p:txBody>
@@ -4425,7 +4425,7 @@
               </a:defRPr>
             </a:pPr>
             <a:r>
-              <a:t>🔗 DIRECT REVIEWER DATA ACCESS DIRECTORY</a:t>
+              <a:t>🔗 ANONYMOUS REVIEWER DATA ACCESS DIRECTORY</a:t>
             </a:r>
           </a:p>
           <a:p>
@@ -4440,7 +4440,7 @@
               </a:defRPr>
             </a:pPr>
             <a:r>
-              <a:t>•  🌐 Live Streamlit App: https://zeptomvp.streamlit.app</a:t>
+              <a:t>•  Live Streamlit App: https://zeptomvp.streamlit.app</a:t>
             </a:r>
           </a:p>
           <a:p>
@@ -4455,7 +4455,7 @@
               </a:defRPr>
             </a:pPr>
             <a:r>
-              <a:t>•  🐙 GitHub Source Code: https://github.com/akhyashukla03/zeptomvp</a:t>
+              <a:t>•  Public Source Code &amp; Datasets: NL_Zepto_Growth_PM_Graduation_Project</a:t>
             </a:r>
           </a:p>
           <a:p>
@@ -4470,7 +4470,7 @@
               </a:defRPr>
             </a:pPr>
             <a:r>
-              <a:t>•  📊 Raw Scraped Reviews JSON: https://raw.githubusercontent.com/akhyashukla03/zeptomvp/main/data/reviews_dataset.json</a:t>
+              <a:t>•  Synthetic Reviews Corpus JSON: https://raw.githubusercontent.com/akhyashukla03/zeptomvp/main/data/reviews_dataset.json</a:t>
             </a:r>
           </a:p>
           <a:p>
@@ -4485,7 +4485,7 @@
               </a:defRPr>
             </a:pPr>
             <a:r>
-              <a:t>•  👥 Primary Survey &amp; Transcripts: https://raw.githubusercontent.com/akhyashukla03/zeptomvp/main/data/interview_transcripts.json</a:t>
+              <a:t>•  Primary Survey &amp; Transcripts: https://raw.githubusercontent.com/akhyashukla03/zeptomvp/main/data/interview_transcripts.json</a:t>
             </a:r>
           </a:p>
         </p:txBody>
@@ -4554,7 +4554,7 @@
               </a:defRPr>
             </a:pPr>
             <a:r>
-              <a:t>Expiry Fear ➔ CCTV Storage Audit ($15/mo) | Return Anxiety ➔ 15-Min Rider Swap | Supply Shortage ➔ Multi-brand fallback pool | Copying ➔ Points Streak Lock-In</a:t>
+              <a:t>Sample Shortage -&gt; Multi-brand fallback pool | Return Anxiety -&gt; 15-Min Rider Swap | Copying -&gt; Points Streak Lock-In on Staples</a:t>
             </a:r>
           </a:p>
         </p:txBody>
@@ -4601,7 +4601,7 @@
           <a:lstStyle/>
           <a:p>
             <a:pPr algn="ctr">
-              <a:defRPr sz="800" b="1">
+              <a:defRPr sz="950" b="1">
                 <a:solidFill>
                   <a:srgbClr val="AAA0BE"/>
                 </a:solidFill>
@@ -4655,14 +4655,14 @@
           <a:lstStyle/>
           <a:p>
             <a:pPr algn="ctr">
-              <a:defRPr sz="800" b="1">
+              <a:defRPr sz="950" b="1">
                 <a:solidFill>
                   <a:srgbClr val="AAA0BE"/>
                 </a:solidFill>
               </a:defRPr>
             </a:pPr>
             <a:r>
-              <a:t>Agent's Market</a:t>
+              <a:t>Market</a:t>
             </a:r>
           </a:p>
         </p:txBody>
@@ -4709,7 +4709,7 @@
           <a:lstStyle/>
           <a:p>
             <a:pPr algn="ctr">
-              <a:defRPr sz="800" b="1">
+              <a:defRPr sz="950" b="1">
                 <a:solidFill>
                   <a:srgbClr val="AAA0BE"/>
                 </a:solidFill>
@@ -4763,7 +4763,7 @@
           <a:lstStyle/>
           <a:p>
             <a:pPr algn="ctr">
-              <a:defRPr sz="800" b="1">
+              <a:defRPr sz="950" b="1">
                 <a:solidFill>
                   <a:srgbClr val="AAA0BE"/>
                 </a:solidFill>
@@ -4817,14 +4817,14 @@
           <a:lstStyle/>
           <a:p>
             <a:pPr algn="ctr">
-              <a:defRPr sz="800" b="1">
+              <a:defRPr sz="950" b="1">
                 <a:solidFill>
                   <a:srgbClr val="AAA0BE"/>
                 </a:solidFill>
               </a:defRPr>
             </a:pPr>
             <a:r>
-              <a:t>Problem Canvas</a:t>
+              <a:t>Canvas</a:t>
             </a:r>
           </a:p>
         </p:txBody>
@@ -4871,7 +4871,7 @@
           <a:lstStyle/>
           <a:p>
             <a:pPr algn="ctr">
-              <a:defRPr sz="800" b="1">
+              <a:defRPr sz="950" b="1">
                 <a:solidFill>
                   <a:srgbClr val="AAA0BE"/>
                 </a:solidFill>
@@ -4925,7 +4925,7 @@
           <a:lstStyle/>
           <a:p>
             <a:pPr algn="ctr">
-              <a:defRPr sz="800" b="1">
+              <a:defRPr sz="950" b="1">
                 <a:solidFill>
                   <a:srgbClr val="AAA0BE"/>
                 </a:solidFill>
@@ -4979,14 +4979,14 @@
           <a:lstStyle/>
           <a:p>
             <a:pPr algn="ctr">
-              <a:defRPr sz="800" b="1">
+              <a:defRPr sz="950" b="1">
                 <a:solidFill>
                   <a:srgbClr val="AAA0BE"/>
                 </a:solidFill>
               </a:defRPr>
             </a:pPr>
             <a:r>
-              <a:t>Journey</a:t>
+              <a:t>Architecture</a:t>
             </a:r>
           </a:p>
         </p:txBody>
@@ -5033,7 +5033,7 @@
           <a:lstStyle/>
           <a:p>
             <a:pPr algn="ctr">
-              <a:defRPr sz="800" b="1">
+              <a:defRPr sz="950" b="1">
                 <a:solidFill>
                   <a:srgbClr val="AAA0BE"/>
                 </a:solidFill>
@@ -5087,14 +5087,14 @@
           <a:lstStyle/>
           <a:p>
             <a:pPr algn="ctr">
-              <a:defRPr sz="800" b="1">
+              <a:defRPr sz="950" b="1">
                 <a:solidFill>
                   <a:srgbClr val="130D1E"/>
                 </a:solidFill>
               </a:defRPr>
             </a:pPr>
             <a:r>
-              <a:t>Risks + GTM</a:t>
+              <a:t>GTM</a:t>
             </a:r>
           </a:p>
         </p:txBody>
@@ -5211,7 +5211,7 @@
               </a:defRPr>
             </a:pPr>
             <a:r>
-              <a:t>  $500M SPENT ON CHECKOUT AD BANNERS. $0 SPENT ON RISK-FREE TRIAL.</a:t>
+              <a:t>  FAST EMERGENCY UTILITY VS TRUSTED PLANNED DESTINATION</a:t>
             </a:r>
           </a:p>
         </p:txBody>
@@ -5242,14 +5242,14 @@
               <a:spcAft>
                 <a:spcPts val="200"/>
               </a:spcAft>
-              <a:defRPr sz="1800" b="1">
+              <a:defRPr sz="1750" b="1">
                 <a:solidFill>
                   <a:srgbClr val="FFFFFF"/>
                 </a:solidFill>
               </a:defRPr>
             </a:pPr>
             <a:r>
-              <a:t>2. Market &amp; Blind Spot: Where Capital Was Spent vs Where Users Get Stuck</a:t>
+              <a:t>2. Frequent Grocery Users Buy Planned Non-Grocery Items Elsewhere Due to Lack of Trust &amp; Risk-Free Trial</a:t>
             </a:r>
           </a:p>
           <a:p>
@@ -5261,7 +5261,7 @@
               </a:defRPr>
             </a:pPr>
             <a:r>
-              <a:t>Why quick-commerce ecosystems optimized 10-minute speed but left category discovery unsolved</a:t>
+              <a:t>Frequent grocery users do not expand into non-grocery categories because QCommerce is perceived as a fast emergency utility.</a:t>
             </a:r>
           </a:p>
         </p:txBody>
@@ -5333,7 +5333,7 @@
               </a:defRPr>
             </a:pPr>
             <a:r>
-              <a:t>•  ✅ 10-Minute Hyper-Local Delivery Speed (Zepto, Blinkit, Instamart)</a:t>
+              <a:t>•  10-Minute Hyper-Local Delivery Speed (Zepto, Blinkit, Instamart).</a:t>
             </a:r>
           </a:p>
           <a:p>
@@ -5348,7 +5348,7 @@
               </a:defRPr>
             </a:pPr>
             <a:r>
-              <a:t>•  ✅ Dark Store Density &amp; Real-Time Inventory (500+ Dark Stores)</a:t>
+              <a:t>•  Dark Store Density &amp; Real-Time Stock (500+ Dark Stores).</a:t>
             </a:r>
           </a:p>
           <a:p>
@@ -5363,7 +5363,7 @@
               </a:defRPr>
             </a:pPr>
             <a:r>
-              <a:t>•  ✅ High-Speed Search &amp; Cart Auto-Complete (Sub-second UI response)</a:t>
+              <a:t>•  Sub-Second Cart Search &amp; Auto-Complete UI.</a:t>
             </a:r>
           </a:p>
         </p:txBody>
@@ -5420,7 +5420,7 @@
               </a:defRPr>
             </a:pPr>
             <a:r>
-              <a:t>❌ WHAT NOBODY HAS SOLVED (THE BLIND SPOT)</a:t>
+              <a:t>❌ WHAT NOBODY HAS SOLVED (THE PURCHASING LEAKAGE)</a:t>
             </a:r>
           </a:p>
           <a:p>
@@ -5435,7 +5435,7 @@
               </a:defRPr>
             </a:pPr>
             <a:r>
-              <a:t>•  ❌ Dark Store Expiry &amp; Hygiene Trust: 20.1% friction (fears heat degrades products)</a:t>
+              <a:t>•  Purchasing Leakage: 83% of surveyed users (20/24) buy planned non-grocery items outside QCommerce on Amazon/Nykaa/DMart [User Survey, N=24].</a:t>
             </a:r>
           </a:p>
           <a:p>
@@ -5450,7 +5450,7 @@
               </a:defRPr>
             </a:pPr>
             <a:r>
-              <a:t>•  ❌ Bulk Buying Price Mismatch: 19.9% friction (DMart/Amazon bulk buy preference)</a:t>
+              <a:t>•  Quality &amp; Expiry Fear: 20.1% of discovery subset (134/667) fear heat degrades dark store inventory [Synthetic Corpus, 667 subset].</a:t>
             </a:r>
           </a:p>
           <a:p>
@@ -5465,7 +5465,7 @@
               </a:defRPr>
             </a:pPr>
             <a:r>
-              <a:t>•  ❌ Risk-Free Product Sampling: 0-CAC sampling moat completely unaddressed</a:t>
+              <a:t>•  Return &amp; Refund Anxiety: 17% of surveyed users (4/24) cite refund chatbot loops as top barrier [User Survey Q4, N=24].</a:t>
             </a:r>
           </a:p>
           <a:p>
@@ -5480,7 +5480,7 @@
               </a:defRPr>
             </a:pPr>
             <a:r>
-              <a:t>•  ❌ Return &amp; Refund Bot Uncertainty: 50% survey friction (reluctance to buy high-value items)</a:t>
+              <a:t>•  Risk-Free Product Sampling: 0-CAC sampling moat completely unaddressed by incumbent ad banners.</a:t>
             </a:r>
           </a:p>
         </p:txBody>
@@ -5596,7 +5596,7 @@
           <a:lstStyle/>
           <a:p>
             <a:pPr algn="ctr">
-              <a:defRPr sz="800" b="1">
+              <a:defRPr sz="950" b="1">
                 <a:solidFill>
                   <a:srgbClr val="AAA0BE"/>
                 </a:solidFill>
@@ -5650,14 +5650,14 @@
           <a:lstStyle/>
           <a:p>
             <a:pPr algn="ctr">
-              <a:defRPr sz="800" b="1">
+              <a:defRPr sz="950" b="1">
                 <a:solidFill>
                   <a:srgbClr val="130D1E"/>
                 </a:solidFill>
               </a:defRPr>
             </a:pPr>
             <a:r>
-              <a:t>Agent's Market</a:t>
+              <a:t>Market</a:t>
             </a:r>
           </a:p>
         </p:txBody>
@@ -5704,7 +5704,7 @@
           <a:lstStyle/>
           <a:p>
             <a:pPr algn="ctr">
-              <a:defRPr sz="800" b="1">
+              <a:defRPr sz="950" b="1">
                 <a:solidFill>
                   <a:srgbClr val="AAA0BE"/>
                 </a:solidFill>
@@ -5758,7 +5758,7 @@
           <a:lstStyle/>
           <a:p>
             <a:pPr algn="ctr">
-              <a:defRPr sz="800" b="1">
+              <a:defRPr sz="950" b="1">
                 <a:solidFill>
                   <a:srgbClr val="AAA0BE"/>
                 </a:solidFill>
@@ -5812,14 +5812,14 @@
           <a:lstStyle/>
           <a:p>
             <a:pPr algn="ctr">
-              <a:defRPr sz="800" b="1">
+              <a:defRPr sz="950" b="1">
                 <a:solidFill>
                   <a:srgbClr val="AAA0BE"/>
                 </a:solidFill>
               </a:defRPr>
             </a:pPr>
             <a:r>
-              <a:t>Problem Canvas</a:t>
+              <a:t>Canvas</a:t>
             </a:r>
           </a:p>
         </p:txBody>
@@ -5866,7 +5866,7 @@
           <a:lstStyle/>
           <a:p>
             <a:pPr algn="ctr">
-              <a:defRPr sz="800" b="1">
+              <a:defRPr sz="950" b="1">
                 <a:solidFill>
                   <a:srgbClr val="AAA0BE"/>
                 </a:solidFill>
@@ -5920,7 +5920,7 @@
           <a:lstStyle/>
           <a:p>
             <a:pPr algn="ctr">
-              <a:defRPr sz="800" b="1">
+              <a:defRPr sz="950" b="1">
                 <a:solidFill>
                   <a:srgbClr val="AAA0BE"/>
                 </a:solidFill>
@@ -5974,14 +5974,14 @@
           <a:lstStyle/>
           <a:p>
             <a:pPr algn="ctr">
-              <a:defRPr sz="800" b="1">
+              <a:defRPr sz="950" b="1">
                 <a:solidFill>
                   <a:srgbClr val="AAA0BE"/>
                 </a:solidFill>
               </a:defRPr>
             </a:pPr>
             <a:r>
-              <a:t>Journey</a:t>
+              <a:t>Architecture</a:t>
             </a:r>
           </a:p>
         </p:txBody>
@@ -6028,7 +6028,7 @@
           <a:lstStyle/>
           <a:p>
             <a:pPr algn="ctr">
-              <a:defRPr sz="800" b="1">
+              <a:defRPr sz="950" b="1">
                 <a:solidFill>
                   <a:srgbClr val="AAA0BE"/>
                 </a:solidFill>
@@ -6082,14 +6082,14 @@
           <a:lstStyle/>
           <a:p>
             <a:pPr algn="ctr">
-              <a:defRPr sz="800" b="1">
+              <a:defRPr sz="950" b="1">
                 <a:solidFill>
                   <a:srgbClr val="AAA0BE"/>
                 </a:solidFill>
               </a:defRPr>
             </a:pPr>
             <a:r>
-              <a:t>Risks + GTM</a:t>
+              <a:t>GTM</a:t>
             </a:r>
           </a:p>
         </p:txBody>
@@ -6206,7 +6206,7 @@
               </a:defRPr>
             </a:pPr>
             <a:r>
-              <a:t>  THE PROBLEM ISN'T BANNER VISIBILITY. IT'S FINANCIAL &amp; QUALITY RISK BEFORE CHECKOUT.</a:t>
+              <a:t>  AI REVIEW WORKFLOW &amp; PRIMARY RESEARCH SYNTHESIS</a:t>
             </a:r>
           </a:p>
         </p:txBody>
@@ -6237,14 +6237,14 @@
               <a:spcAft>
                 <a:spcPts val="200"/>
               </a:spcAft>
-              <a:defRPr sz="1800" b="1">
+              <a:defRPr sz="1750" b="1">
                 <a:solidFill>
                   <a:srgbClr val="FFFFFF"/>
                 </a:solidFill>
               </a:defRPr>
             </a:pPr>
             <a:r>
-              <a:t>3. AI Discovery Engine: 2,000 Social Reviews &amp; N=22 Survey Data</a:t>
+              <a:t>3. AI Review Pipeline Identified Recurring Barriers, Then Primary Research Validated 3 Core Blocker Buckets</a:t>
             </a:r>
           </a:p>
           <a:p>
@@ -6256,7 +6256,7 @@
               </a:defRPr>
             </a:pPr>
             <a:r>
-              <a:t>Synthesizing 10 multi-platform channels (Play Store, App Store, Reddit, Quora, LinkedIn, ProductHunt, Trustpilot, Twitter, MouthShut)</a:t>
+              <a:t>Synthesizing synthetic review patterns and primary survey responses into 3 actionable barrier buckets.</a:t>
             </a:r>
           </a:p>
         </p:txBody>
@@ -6313,7 +6313,7 @@
               </a:defRPr>
             </a:pPr>
             <a:r>
-              <a:t>📊 2,000 SCRAPED REVIEWS BREAKDOWN (RAW DATA LINK INCLUDED)</a:t>
+              <a:t>📊 AI REVIEW PIPELINE &amp; SYNTHETIC CORPUS (2,000 ITEMS)</a:t>
             </a:r>
           </a:p>
           <a:p>
@@ -6328,7 +6328,7 @@
               </a:defRPr>
             </a:pPr>
             <a:r>
-              <a:t>•  Dataset Access: Direct JSON link at https://raw.githubusercontent.com/akhyashukla03/zeptomvp/main/data/reviews_dataset.json</a:t>
+              <a:t>•  AI Pipeline: Ingested 2,000 synthetic items (200 x 10 channels) -&gt; Cleaned -&gt; Clustered complaint patterns.</a:t>
             </a:r>
           </a:p>
           <a:p>
@@ -6343,7 +6343,7 @@
               </a:defRPr>
             </a:pPr>
             <a:r>
-              <a:t>•  Quality &amp; Expiry Fear (20.1%): Fear active ingredients degrade in hot dark stores.</a:t>
+              <a:t>•  Operational Exclusion: Filtered 1,333 operational complaints (66.7%). Evaluated 667 discovery-relevant subset.</a:t>
             </a:r>
           </a:p>
           <a:p>
@@ -6358,7 +6358,64 @@
               </a:defRPr>
             </a:pPr>
             <a:r>
-              <a:t>•  Planned Buy Mismatch (19.9%): Preference for buying diapers &amp; pet food in bulk on DMart.</a:t>
+              <a:t>•  Barrier Distribution (667 subset): Quality Fear 20.1% (134/667), Impulse Fatigue 20.1% (134/667), Low Awareness 19.9% (133/667), Planned Mismatch 19.9% (133/667), Packaging Guilt 19.9% (133/667).</a:t>
+            </a:r>
+          </a:p>
+        </p:txBody>
+      </p:sp>
+      <p:sp>
+        <p:nvSpPr>
+          <p:cNvPr id="6" name="Rounded Rectangle 5"/>
+          <p:cNvSpPr/>
+          <p:nvPr/>
+        </p:nvSpPr>
+        <p:spPr>
+          <a:xfrm>
+            <a:off x="6291072" y="1755648"/>
+            <a:ext cx="5440680" cy="3474720"/>
+          </a:xfrm>
+          <a:prstGeom prst="roundRect">
+            <a:avLst/>
+          </a:prstGeom>
+          <a:solidFill>
+            <a:srgbClr val="1E1430"/>
+          </a:solidFill>
+          <a:ln w="19050">
+            <a:solidFill>
+              <a:srgbClr val="8224E3"/>
+            </a:solidFill>
+          </a:ln>
+        </p:spPr>
+        <p:style>
+          <a:lnRef idx="1">
+            <a:schemeClr val="accent1"/>
+          </a:lnRef>
+          <a:fillRef idx="3">
+            <a:schemeClr val="accent1"/>
+          </a:fillRef>
+          <a:effectRef idx="2">
+            <a:schemeClr val="accent1"/>
+          </a:effectRef>
+          <a:fontRef idx="minor">
+            <a:schemeClr val="lt1"/>
+          </a:fontRef>
+        </p:style>
+        <p:txBody>
+          <a:bodyPr rtlCol="0" anchor="ctr" wrap="square" lIns="164592" tIns="137160" rIns="164592" bIns="137160"/>
+          <a:lstStyle/>
+          <a:p>
+            <a:pPr algn="ctr">
+              <a:spcAft>
+                <a:spcPts val="600"/>
+              </a:spcAft>
+              <a:defRPr sz="1200" b="1">
+                <a:solidFill>
+                  <a:srgbClr val="FFD700"/>
+                </a:solidFill>
+              </a:defRPr>
+            </a:pPr>
+            <a:r>
+              <a:t>🎯 3 SYNTHESIZED BARRIER BUCKETS (USER SURVEY, N=24)</a:t>
             </a:r>
           </a:p>
           <a:p>
@@ -6373,7 +6430,7 @@
               </a:defRPr>
             </a:pPr>
             <a:r>
-              <a:t>•  Ecological Packaging Guilt (15.3%): Friction around single-item plastic packaging waste.</a:t>
+              <a:t>•  1. Trust Barrier: Quality/expiry fear (25%, 6/24) &amp; Return/refund chatbot uncertainty (17%, 4/24) [Survey Q4].</a:t>
             </a:r>
           </a:p>
           <a:p>
@@ -6388,64 +6445,7 @@
               </a:defRPr>
             </a:pPr>
             <a:r>
-              <a:t>•  Checkout Dark Pattern Fatigue (15.9%): Annoyance with rain fees &amp; tip popups.</a:t>
-            </a:r>
-          </a:p>
-        </p:txBody>
-      </p:sp>
-      <p:sp>
-        <p:nvSpPr>
-          <p:cNvPr id="6" name="Rounded Rectangle 5"/>
-          <p:cNvSpPr/>
-          <p:nvPr/>
-        </p:nvSpPr>
-        <p:spPr>
-          <a:xfrm>
-            <a:off x="6291072" y="1755648"/>
-            <a:ext cx="5440680" cy="3474720"/>
-          </a:xfrm>
-          <a:prstGeom prst="roundRect">
-            <a:avLst/>
-          </a:prstGeom>
-          <a:solidFill>
-            <a:srgbClr val="1E1430"/>
-          </a:solidFill>
-          <a:ln w="19050">
-            <a:solidFill>
-              <a:srgbClr val="8224E3"/>
-            </a:solidFill>
-          </a:ln>
-        </p:spPr>
-        <p:style>
-          <a:lnRef idx="1">
-            <a:schemeClr val="accent1"/>
-          </a:lnRef>
-          <a:fillRef idx="3">
-            <a:schemeClr val="accent1"/>
-          </a:fillRef>
-          <a:effectRef idx="2">
-            <a:schemeClr val="accent1"/>
-          </a:effectRef>
-          <a:fontRef idx="minor">
-            <a:schemeClr val="lt1"/>
-          </a:fontRef>
-        </p:style>
-        <p:txBody>
-          <a:bodyPr rtlCol="0" anchor="ctr" wrap="square" lIns="164592" tIns="137160" rIns="164592" bIns="137160"/>
-          <a:lstStyle/>
-          <a:p>
-            <a:pPr algn="ctr">
-              <a:spcAft>
-                <a:spcPts val="600"/>
-              </a:spcAft>
-              <a:defRPr sz="1200" b="1">
-                <a:solidFill>
-                  <a:srgbClr val="FFD700"/>
-                </a:solidFill>
-              </a:defRPr>
-            </a:pPr>
-            <a:r>
-              <a:t>🎯 N=22 LIVE AUDIENCE SURVEY SCORECARD</a:t>
+              <a:t>•  2. Purchase-Mode Barrier: Planned bulk-buy habit mismatch (33%, 8/24); 83% (20/24) buy planned items on Amazon/Nykaa/DMart.</a:t>
             </a:r>
           </a:p>
           <a:p>
@@ -6460,67 +6460,7 @@
               </a:defRPr>
             </a:pPr>
             <a:r>
-              <a:t>•  82% Power-User Frequency: Order 1–4+ times/week on quick-commerce apps.</a:t>
-            </a:r>
-          </a:p>
-          <a:p>
-            <a:pPr>
-              <a:spcAft>
-                <a:spcPts val="400"/>
-              </a:spcAft>
-              <a:defRPr sz="950">
-                <a:solidFill>
-                  <a:srgbClr val="E2D9F3"/>
-                </a:solidFill>
-              </a:defRPr>
-            </a:pPr>
-            <a:r>
-              <a:t>•  68% Grocery Points Streak Preference: Voted points multiplier as #1 perk over cashbacks.</a:t>
-            </a:r>
-          </a:p>
-          <a:p>
-            <a:pPr>
-              <a:spcAft>
-                <a:spcPts val="400"/>
-              </a:spcAft>
-              <a:defRPr sz="950">
-                <a:solidFill>
-                  <a:srgbClr val="E2D9F3"/>
-                </a:solidFill>
-              </a:defRPr>
-            </a:pPr>
-            <a:r>
-              <a:t>•  50% Return Anxiety Objection: Refund chatbot loops identified as top buying blocker.</a:t>
-            </a:r>
-          </a:p>
-          <a:p>
-            <a:pPr>
-              <a:spcAft>
-                <a:spcPts val="400"/>
-              </a:spcAft>
-              <a:defRPr sz="950">
-                <a:solidFill>
-                  <a:srgbClr val="E2D9F3"/>
-                </a:solidFill>
-              </a:defRPr>
-            </a:pPr>
-            <a:r>
-              <a:t>•  91% Doorstep Swap Trust: Rated 15-Min Doorstep Replacement at 3.0–5.0 trust boost.</a:t>
-            </a:r>
-          </a:p>
-          <a:p>
-            <a:pPr>
-              <a:spcAft>
-                <a:spcPts val="400"/>
-              </a:spcAft>
-              <a:defRPr sz="950">
-                <a:solidFill>
-                  <a:srgbClr val="E2D9F3"/>
-                </a:solidFill>
-              </a:defRPr>
-            </a:pPr>
-            <a:r>
-              <a:t>•  36% B2B Sampling Validation: Confirmed free brand samples drive category trial.</a:t>
+              <a:t>•  3. Salience Barrier: Low category awareness (21%, 5/24) due to search-centric speed and banner blindness.</a:t>
             </a:r>
           </a:p>
         </p:txBody>
@@ -6589,7 +6529,7 @@
               </a:defRPr>
             </a:pPr>
             <a:r>
-              <a:t>Users don't need intrusive checkout banner ads. They need a B2B trial sample packed directly in their regular grocery bag and a 15-minute doorstep swap guarantee.</a:t>
+              <a:t>Users don't need intrusive checkout banner ads. They need an AI trust cue, a B2B trial sample in their regular bag, and a 15-minute doorstep swap guarantee.</a:t>
             </a:r>
           </a:p>
         </p:txBody>
@@ -6636,7 +6576,7 @@
           <a:lstStyle/>
           <a:p>
             <a:pPr algn="ctr">
-              <a:defRPr sz="800" b="1">
+              <a:defRPr sz="950" b="1">
                 <a:solidFill>
                   <a:srgbClr val="AAA0BE"/>
                 </a:solidFill>
@@ -6690,14 +6630,14 @@
           <a:lstStyle/>
           <a:p>
             <a:pPr algn="ctr">
-              <a:defRPr sz="800" b="1">
+              <a:defRPr sz="950" b="1">
                 <a:solidFill>
                   <a:srgbClr val="AAA0BE"/>
                 </a:solidFill>
               </a:defRPr>
             </a:pPr>
             <a:r>
-              <a:t>Agent's Market</a:t>
+              <a:t>Market</a:t>
             </a:r>
           </a:p>
         </p:txBody>
@@ -6744,7 +6684,7 @@
           <a:lstStyle/>
           <a:p>
             <a:pPr algn="ctr">
-              <a:defRPr sz="800" b="1">
+              <a:defRPr sz="950" b="1">
                 <a:solidFill>
                   <a:srgbClr val="130D1E"/>
                 </a:solidFill>
@@ -6798,7 +6738,7 @@
           <a:lstStyle/>
           <a:p>
             <a:pPr algn="ctr">
-              <a:defRPr sz="800" b="1">
+              <a:defRPr sz="950" b="1">
                 <a:solidFill>
                   <a:srgbClr val="AAA0BE"/>
                 </a:solidFill>
@@ -6852,14 +6792,14 @@
           <a:lstStyle/>
           <a:p>
             <a:pPr algn="ctr">
-              <a:defRPr sz="800" b="1">
+              <a:defRPr sz="950" b="1">
                 <a:solidFill>
                   <a:srgbClr val="AAA0BE"/>
                 </a:solidFill>
               </a:defRPr>
             </a:pPr>
             <a:r>
-              <a:t>Problem Canvas</a:t>
+              <a:t>Canvas</a:t>
             </a:r>
           </a:p>
         </p:txBody>
@@ -6906,7 +6846,7 @@
           <a:lstStyle/>
           <a:p>
             <a:pPr algn="ctr">
-              <a:defRPr sz="800" b="1">
+              <a:defRPr sz="950" b="1">
                 <a:solidFill>
                   <a:srgbClr val="AAA0BE"/>
                 </a:solidFill>
@@ -6960,7 +6900,7 @@
           <a:lstStyle/>
           <a:p>
             <a:pPr algn="ctr">
-              <a:defRPr sz="800" b="1">
+              <a:defRPr sz="950" b="1">
                 <a:solidFill>
                   <a:srgbClr val="AAA0BE"/>
                 </a:solidFill>
@@ -7014,14 +6954,14 @@
           <a:lstStyle/>
           <a:p>
             <a:pPr algn="ctr">
-              <a:defRPr sz="800" b="1">
+              <a:defRPr sz="950" b="1">
                 <a:solidFill>
                   <a:srgbClr val="AAA0BE"/>
                 </a:solidFill>
               </a:defRPr>
             </a:pPr>
             <a:r>
-              <a:t>Journey</a:t>
+              <a:t>Architecture</a:t>
             </a:r>
           </a:p>
         </p:txBody>
@@ -7068,7 +7008,7 @@
           <a:lstStyle/>
           <a:p>
             <a:pPr algn="ctr">
-              <a:defRPr sz="800" b="1">
+              <a:defRPr sz="950" b="1">
                 <a:solidFill>
                   <a:srgbClr val="AAA0BE"/>
                 </a:solidFill>
@@ -7122,14 +7062,14 @@
           <a:lstStyle/>
           <a:p>
             <a:pPr algn="ctr">
-              <a:defRPr sz="800" b="1">
+              <a:defRPr sz="950" b="1">
                 <a:solidFill>
                   <a:srgbClr val="AAA0BE"/>
                 </a:solidFill>
               </a:defRPr>
             </a:pPr>
             <a:r>
-              <a:t>Risks + GTM</a:t>
+              <a:t>GTM</a:t>
             </a:r>
           </a:p>
         </p:txBody>
@@ -7246,7 +7186,7 @@
               </a:defRPr>
             </a:pPr>
             <a:r>
-              <a:t>  THEY USE ZEPTO EVERY MORNING. THEY JUST CAN'T TRUST NON-GROCERY ITEMS AT CHECKOUT.</a:t>
+              <a:t>  HIGH-FREQUENCY GROCERY BUYERS WHO LEAK NON-GROCERY SPEND</a:t>
             </a:r>
           </a:p>
         </p:txBody>
@@ -7277,14 +7217,14 @@
               <a:spcAft>
                 <a:spcPts val="200"/>
               </a:spcAft>
-              <a:defRPr sz="1800" b="1">
+              <a:defRPr sz="1750" b="1">
                 <a:solidFill>
                   <a:srgbClr val="FFFFFF"/>
                 </a:solidFill>
               </a:defRPr>
             </a:pPr>
             <a:r>
-              <a:t>4. Behavioral Segmentation &amp; Persona Deep-Dive (Figma UI Design)</a:t>
+              <a:t>4. Target Segment: High-Frequency Grocery Users Open to Low-Risk Adjacent Category Trials</a:t>
             </a:r>
           </a:p>
           <a:p>
@@ -7296,7 +7236,7 @@
               </a:defRPr>
             </a:pPr>
             <a:r>
-              <a:t>Targeting the Cautious Explorer &amp; Perfectionist Prompter cohorts with Figma UI Mockups</a:t>
+              <a:t>Targeting retained grocery refuelers who already trust Zepto for daily essentials but buy non-groceries elsewhere.</a:t>
             </a:r>
           </a:p>
         </p:txBody>
@@ -7353,7 +7293,7 @@
               </a:defRPr>
             </a:pPr>
             <a:r>
-              <a:t>📊 BEHAVIORAL SEGMENTATION (2x2 MATRIX)</a:t>
+              <a:t>📊 TARGET COHORT PROFILE &amp; RATIONALE</a:t>
             </a:r>
           </a:p>
           <a:p>
@@ -7368,7 +7308,7 @@
               </a:defRPr>
             </a:pPr>
             <a:r>
-              <a:t>•  Habitual Refiller (71%): Buys milk/bread daily, ignores all promotional banners.</a:t>
+              <a:t>•  Cohort Definition: High-frequency grocery users (79% order weekly+, 19/24) who leak non-grocery spend to Amazon/Nykaa (83%, 20/24).</a:t>
             </a:r>
           </a:p>
           <a:p>
@@ -7383,7 +7323,7 @@
               </a:defRPr>
             </a:pPr>
             <a:r>
-              <a:t>•  Cautious Explorer (20%): Wants skincare/pet food but fears dark store product expiry.</a:t>
+              <a:t>•  Strategic Fit: Retained users with high basket frequency; lower CAC than acquiring new users.</a:t>
             </a:r>
           </a:p>
           <a:p>
@@ -7398,22 +7338,7 @@
               </a:defRPr>
             </a:pPr>
             <a:r>
-              <a:t>•  Impulse Avoider (6%): Hates checkout dark patterns, delivery fees, and rain charges.</a:t>
-            </a:r>
-          </a:p>
-          <a:p>
-            <a:pPr>
-              <a:spcAft>
-                <a:spcPts val="400"/>
-              </a:spcAft>
-              <a:defRPr sz="950">
-                <a:solidFill>
-                  <a:srgbClr val="E2D9F3"/>
-                </a:solidFill>
-              </a:defRPr>
-            </a:pPr>
-            <a:r>
-              <a:t>•  Routine Questor (3%): Converts when non-grocery buys cross-subsidize grocery savings.</a:t>
+              <a:t>•  Behavioral Obstacle: Code quick-commerce strictly as an urgent emergency utility, avoiding non-grocery items due to perceived quality risk.</a:t>
             </a:r>
           </a:p>
         </p:txBody>
@@ -7506,7 +7431,7 @@
               </a:defRPr>
             </a:pPr>
             <a:r>
-              <a:t>Cuts pre-checkout anxiety loops. Makes multi-category exploration safe. Boosts customer LTV by 3.4x via B2B sampling and loyalty points lock-in.</a:t>
+              <a:t>Cuts pre-checkout anxiety loops. Makes multi-category exploration safe. Boosts customer LTV by 3.4x via B2B sampling and loyalty points lock-in [Illustrative Assumption].</a:t>
             </a:r>
           </a:p>
         </p:txBody>
@@ -7553,7 +7478,7 @@
           <a:lstStyle/>
           <a:p>
             <a:pPr algn="ctr">
-              <a:defRPr sz="800" b="1">
+              <a:defRPr sz="950" b="1">
                 <a:solidFill>
                   <a:srgbClr val="AAA0BE"/>
                 </a:solidFill>
@@ -7607,14 +7532,14 @@
           <a:lstStyle/>
           <a:p>
             <a:pPr algn="ctr">
-              <a:defRPr sz="800" b="1">
+              <a:defRPr sz="950" b="1">
                 <a:solidFill>
                   <a:srgbClr val="AAA0BE"/>
                 </a:solidFill>
               </a:defRPr>
             </a:pPr>
             <a:r>
-              <a:t>Agent's Market</a:t>
+              <a:t>Market</a:t>
             </a:r>
           </a:p>
         </p:txBody>
@@ -7661,7 +7586,7 @@
           <a:lstStyle/>
           <a:p>
             <a:pPr algn="ctr">
-              <a:defRPr sz="800" b="1">
+              <a:defRPr sz="950" b="1">
                 <a:solidFill>
                   <a:srgbClr val="AAA0BE"/>
                 </a:solidFill>
@@ -7715,7 +7640,7 @@
           <a:lstStyle/>
           <a:p>
             <a:pPr algn="ctr">
-              <a:defRPr sz="800" b="1">
+              <a:defRPr sz="950" b="1">
                 <a:solidFill>
                   <a:srgbClr val="130D1E"/>
                 </a:solidFill>
@@ -7769,14 +7694,14 @@
           <a:lstStyle/>
           <a:p>
             <a:pPr algn="ctr">
-              <a:defRPr sz="800" b="1">
+              <a:defRPr sz="950" b="1">
                 <a:solidFill>
                   <a:srgbClr val="AAA0BE"/>
                 </a:solidFill>
               </a:defRPr>
             </a:pPr>
             <a:r>
-              <a:t>Problem Canvas</a:t>
+              <a:t>Canvas</a:t>
             </a:r>
           </a:p>
         </p:txBody>
@@ -7823,7 +7748,7 @@
           <a:lstStyle/>
           <a:p>
             <a:pPr algn="ctr">
-              <a:defRPr sz="800" b="1">
+              <a:defRPr sz="950" b="1">
                 <a:solidFill>
                   <a:srgbClr val="AAA0BE"/>
                 </a:solidFill>
@@ -7877,7 +7802,7 @@
           <a:lstStyle/>
           <a:p>
             <a:pPr algn="ctr">
-              <a:defRPr sz="800" b="1">
+              <a:defRPr sz="950" b="1">
                 <a:solidFill>
                   <a:srgbClr val="AAA0BE"/>
                 </a:solidFill>
@@ -7931,14 +7856,14 @@
           <a:lstStyle/>
           <a:p>
             <a:pPr algn="ctr">
-              <a:defRPr sz="800" b="1">
+              <a:defRPr sz="950" b="1">
                 <a:solidFill>
                   <a:srgbClr val="AAA0BE"/>
                 </a:solidFill>
               </a:defRPr>
             </a:pPr>
             <a:r>
-              <a:t>Journey</a:t>
+              <a:t>Architecture</a:t>
             </a:r>
           </a:p>
         </p:txBody>
@@ -7985,7 +7910,7 @@
           <a:lstStyle/>
           <a:p>
             <a:pPr algn="ctr">
-              <a:defRPr sz="800" b="1">
+              <a:defRPr sz="950" b="1">
                 <a:solidFill>
                   <a:srgbClr val="AAA0BE"/>
                 </a:solidFill>
@@ -8039,14 +7964,14 @@
           <a:lstStyle/>
           <a:p>
             <a:pPr algn="ctr">
-              <a:defRPr sz="800" b="1">
+              <a:defRPr sz="950" b="1">
                 <a:solidFill>
                   <a:srgbClr val="AAA0BE"/>
                 </a:solidFill>
               </a:defRPr>
             </a:pPr>
             <a:r>
-              <a:t>Risks + GTM</a:t>
+              <a:t>GTM</a:t>
             </a:r>
           </a:p>
         </p:txBody>
@@ -8194,14 +8119,14 @@
               <a:spcAft>
                 <a:spcPts val="200"/>
               </a:spcAft>
-              <a:defRPr sz="1800" b="1">
+              <a:defRPr sz="1750" b="1">
                 <a:solidFill>
                   <a:srgbClr val="FFFFFF"/>
                 </a:solidFill>
               </a:defRPr>
             </a:pPr>
             <a:r>
-              <a:t>5. Problem Canvas &amp; Opportunity Sizing ($480M SOM)</a:t>
+              <a:t>5. Eliminating Trial Barriers Converts High-Frequency Grocery Traffic into High-Margin LTV</a:t>
             </a:r>
           </a:p>
           <a:p>
@@ -8213,7 +8138,7 @@
               </a:defRPr>
             </a:pPr>
             <a:r>
-              <a:t>Shifting low-margin grocery orders (~10% margin) to 35%–50% gross margin categories</a:t>
+              <a:t>Financial flywheel model driven by zero-CAC sampling and loyalty point cross-subsidization.</a:t>
             </a:r>
           </a:p>
         </p:txBody>
@@ -8285,7 +8210,7 @@
               </a:defRPr>
             </a:pPr>
             <a:r>
-              <a:t>•  TAM: $18.0B — Total Indian Quick Commerce Market Projection by 2028.</a:t>
+              <a:t>•  TAM: $18.0B — Total Indian Quick Commerce Market Projection by 2028 [Redseer/Bain Industry Estimate].</a:t>
             </a:r>
           </a:p>
           <a:p>
@@ -8300,7 +8225,7 @@
               </a:defRPr>
             </a:pPr>
             <a:r>
-              <a:t>•  SAM: $4.2B — Non-Grocery Quick Commerce Penetration Potential.</a:t>
+              <a:t>•  SAM: $4.2B — Non-Grocery Quick Commerce Penetration Potential [Illustrative Modeling Estimate].</a:t>
             </a:r>
           </a:p>
           <a:p>
@@ -8315,7 +8240,7 @@
               </a:defRPr>
             </a:pPr>
             <a:r>
-              <a:t>•  SOM: $480M — Zepto Cross-Category Discovery Capture Opportunity.</a:t>
+              <a:t>•  SOM: $480M — Zepto Cross-Category Discovery Capture Opportunity [Illustrative Modeling Estimate].</a:t>
             </a:r>
           </a:p>
         </p:txBody>
@@ -8372,7 +8297,7 @@
               </a:defRPr>
             </a:pPr>
             <a:r>
-              <a:t>🎯 EXPECTED SOLUTION IMPACT METRICS</a:t>
+              <a:t>🎯 VALIDATED CONVERSION LEVERS (N=24)</a:t>
             </a:r>
           </a:p>
           <a:p>
@@ -8387,7 +8312,7 @@
               </a:defRPr>
             </a:pPr>
             <a:r>
-              <a:t>•  B2B Free Sampling: 0% trial → 36% trial rate (+4.5x Category Trial Rate).</a:t>
+              <a:t>•  Risk-Free Trial: 38% of survey respondents (9/24) state a free trial sample in their bag would drive new category trial.</a:t>
             </a:r>
           </a:p>
           <a:p>
@@ -8402,7 +8327,7 @@
               </a:defRPr>
             </a:pPr>
             <a:r>
-              <a:t>•  Routine Quest Streaks: 10% margin → 2x Points on Staples (+68% Retention Rate).</a:t>
+              <a:t>•  Loyalty Lock-In: 63% of survey respondents (15/24) prefer loyalty points tied to daily essentials unlocked by trying new categories.</a:t>
             </a:r>
           </a:p>
           <a:p>
@@ -8417,7 +8342,7 @@
               </a:defRPr>
             </a:pPr>
             <a:r>
-              <a:t>•  15-Min Rider Swap: 71% return fear → 91% trust score (-50% Return Anxiety).</a:t>
+              <a:t>•  Rider Swap Trust: 92% of survey respondents (22/24) rate a 15-minute doorstep swap guarantee between 3.0 and 5.0 on trust impact.</a:t>
             </a:r>
           </a:p>
         </p:txBody>
@@ -8486,7 +8411,7 @@
               </a:defRPr>
             </a:pPr>
             <a:r>
-              <a:t>15M active users → 12.3M stuck in grocery tunnel vision. Only 8.2% reach non-groceries. Closing that gap yields $480M SOM expansion and lifts net profitability.</a:t>
+              <a:t>Shifting grocery refillers to 35%–50% margin categories expands gross margin by +300bps and captures $480M SOM [Illustrative Modeling Estimate].</a:t>
             </a:r>
           </a:p>
         </p:txBody>
@@ -8533,7 +8458,7 @@
           <a:lstStyle/>
           <a:p>
             <a:pPr algn="ctr">
-              <a:defRPr sz="800" b="1">
+              <a:defRPr sz="950" b="1">
                 <a:solidFill>
                   <a:srgbClr val="AAA0BE"/>
                 </a:solidFill>
@@ -8587,14 +8512,14 @@
           <a:lstStyle/>
           <a:p>
             <a:pPr algn="ctr">
-              <a:defRPr sz="800" b="1">
+              <a:defRPr sz="950" b="1">
                 <a:solidFill>
                   <a:srgbClr val="AAA0BE"/>
                 </a:solidFill>
               </a:defRPr>
             </a:pPr>
             <a:r>
-              <a:t>Agent's Market</a:t>
+              <a:t>Market</a:t>
             </a:r>
           </a:p>
         </p:txBody>
@@ -8641,7 +8566,7 @@
           <a:lstStyle/>
           <a:p>
             <a:pPr algn="ctr">
-              <a:defRPr sz="800" b="1">
+              <a:defRPr sz="950" b="1">
                 <a:solidFill>
                   <a:srgbClr val="AAA0BE"/>
                 </a:solidFill>
@@ -8695,7 +8620,7 @@
           <a:lstStyle/>
           <a:p>
             <a:pPr algn="ctr">
-              <a:defRPr sz="800" b="1">
+              <a:defRPr sz="950" b="1">
                 <a:solidFill>
                   <a:srgbClr val="AAA0BE"/>
                 </a:solidFill>
@@ -8749,14 +8674,14 @@
           <a:lstStyle/>
           <a:p>
             <a:pPr algn="ctr">
-              <a:defRPr sz="800" b="1">
+              <a:defRPr sz="950" b="1">
                 <a:solidFill>
                   <a:srgbClr val="130D1E"/>
                 </a:solidFill>
               </a:defRPr>
             </a:pPr>
             <a:r>
-              <a:t>Problem Canvas</a:t>
+              <a:t>Canvas</a:t>
             </a:r>
           </a:p>
         </p:txBody>
@@ -8803,7 +8728,7 @@
           <a:lstStyle/>
           <a:p>
             <a:pPr algn="ctr">
-              <a:defRPr sz="800" b="1">
+              <a:defRPr sz="950" b="1">
                 <a:solidFill>
                   <a:srgbClr val="AAA0BE"/>
                 </a:solidFill>
@@ -8857,7 +8782,7 @@
           <a:lstStyle/>
           <a:p>
             <a:pPr algn="ctr">
-              <a:defRPr sz="800" b="1">
+              <a:defRPr sz="950" b="1">
                 <a:solidFill>
                   <a:srgbClr val="AAA0BE"/>
                 </a:solidFill>
@@ -8911,14 +8836,14 @@
           <a:lstStyle/>
           <a:p>
             <a:pPr algn="ctr">
-              <a:defRPr sz="800" b="1">
+              <a:defRPr sz="950" b="1">
                 <a:solidFill>
                   <a:srgbClr val="AAA0BE"/>
                 </a:solidFill>
               </a:defRPr>
             </a:pPr>
             <a:r>
-              <a:t>Journey</a:t>
+              <a:t>Architecture</a:t>
             </a:r>
           </a:p>
         </p:txBody>
@@ -8965,7 +8890,7 @@
           <a:lstStyle/>
           <a:p>
             <a:pPr algn="ctr">
-              <a:defRPr sz="800" b="1">
+              <a:defRPr sz="950" b="1">
                 <a:solidFill>
                   <a:srgbClr val="AAA0BE"/>
                 </a:solidFill>
@@ -9019,14 +8944,14 @@
           <a:lstStyle/>
           <a:p>
             <a:pPr algn="ctr">
-              <a:defRPr sz="800" b="1">
+              <a:defRPr sz="950" b="1">
                 <a:solidFill>
                   <a:srgbClr val="AAA0BE"/>
                 </a:solidFill>
               </a:defRPr>
             </a:pPr>
             <a:r>
-              <a:t>Risks + GTM</a:t>
+              <a:t>GTM</a:t>
             </a:r>
           </a:p>
         </p:txBody>
@@ -9143,7 +9068,7 @@
               </a:defRPr>
             </a:pPr>
             <a:r>
-              <a:t>  THREE HORIZONS OF DISCOVERY - SAMPLE, SWAP, LOCK-IN.</a:t>
+              <a:t>  STRATEGIC ALTERNATIVES &amp; PRIORITIZATION MATRIX</a:t>
             </a:r>
           </a:p>
         </p:txBody>
@@ -9174,14 +9099,14 @@
               <a:spcAft>
                 <a:spcPts val="200"/>
               </a:spcAft>
-              <a:defRPr sz="1800" b="1">
+              <a:defRPr sz="1750" b="1">
                 <a:solidFill>
                   <a:srgbClr val="FFFFFF"/>
                 </a:solidFill>
               </a:defRPr>
             </a:pPr>
             <a:r>
-              <a:t>6. Ideation &amp; RICE Prioritization Matrix</a:t>
+              <a:t>6. Strategic Comparison: Why Trust-Led In-Bag Sampling Beats Ad Banners &amp; Discounting</a:t>
             </a:r>
           </a:p>
           <a:p>
@@ -9193,7 +9118,7 @@
               </a:defRPr>
             </a:pPr>
             <a:r>
-              <a:t>Starting with the B2B Sampling Flywheel, expanding to reverse logistics rider swaps</a:t>
+              <a:t>Comparing alternative growth levers demonstrates why in-bag trial provides the highest impact at lowest effort.</a:t>
             </a:r>
           </a:p>
         </p:txBody>
@@ -9250,7 +9175,7 @@
               </a:defRPr>
             </a:pPr>
             <a:r>
-              <a:t>🏆 THREE STRATEGIC HORIZONS</a:t>
+              <a:t>⚡ ALTERNATIVES VS TRUST-LED SAMPLING</a:t>
             </a:r>
           </a:p>
           <a:p>
@@ -9265,7 +9190,7 @@
               </a:defRPr>
             </a:pPr>
             <a:r>
-              <a:t>•  Horizon 1 (MVP): ZEPTO DISCOVERY PASS &amp; B2B SAMPLING (RICE Score: 210.0)</a:t>
+              <a:t>•  Homepage Banners: Ignored due to impulse fatigue (20.1% review subset); zero impact on trust.</a:t>
             </a:r>
           </a:p>
           <a:p>
@@ -9280,7 +9205,7 @@
               </a:defRPr>
             </a:pPr>
             <a:r>
-              <a:t>•  Horizon 2 (Growth): 15-MIN DOORSTEP RIDER SWAP &amp; SHADE MATCH (RICE Score: 180.0)</a:t>
+              <a:t>•  Broad Discounting: Destroys unit margins without addressing quality/expiry fears.</a:t>
             </a:r>
           </a:p>
           <a:p>
@@ -9295,64 +9220,7 @@
               </a:defRPr>
             </a:pPr>
             <a:r>
-              <a:t>•  Horizon 3 (Vision): ZEPTO ROUTINE QUESTS &amp; CATEGORY STREAKS (RICE Score: 160.0)</a:t>
-            </a:r>
-          </a:p>
-        </p:txBody>
-      </p:sp>
-      <p:sp>
-        <p:nvSpPr>
-          <p:cNvPr id="6" name="Rounded Rectangle 5"/>
-          <p:cNvSpPr/>
-          <p:nvPr/>
-        </p:nvSpPr>
-        <p:spPr>
-          <a:xfrm>
-            <a:off x="6291072" y="1755648"/>
-            <a:ext cx="5440680" cy="3474720"/>
-          </a:xfrm>
-          <a:prstGeom prst="roundRect">
-            <a:avLst/>
-          </a:prstGeom>
-          <a:solidFill>
-            <a:srgbClr val="1E1430"/>
-          </a:solidFill>
-          <a:ln w="19050">
-            <a:solidFill>
-              <a:srgbClr val="8224E3"/>
-            </a:solidFill>
-          </a:ln>
-        </p:spPr>
-        <p:style>
-          <a:lnRef idx="1">
-            <a:schemeClr val="accent1"/>
-          </a:lnRef>
-          <a:fillRef idx="3">
-            <a:schemeClr val="accent1"/>
-          </a:fillRef>
-          <a:effectRef idx="2">
-            <a:schemeClr val="accent1"/>
-          </a:effectRef>
-          <a:fontRef idx="minor">
-            <a:schemeClr val="lt1"/>
-          </a:fontRef>
-        </p:style>
-        <p:txBody>
-          <a:bodyPr rtlCol="0" anchor="ctr" wrap="square" lIns="164592" tIns="137160" rIns="164592" bIns="137160"/>
-          <a:lstStyle/>
-          <a:p>
-            <a:pPr algn="ctr">
-              <a:spcAft>
-                <a:spcPts val="600"/>
-              </a:spcAft>
-              <a:defRPr sz="1200" b="1">
-                <a:solidFill>
-                  <a:srgbClr val="FFD700"/>
-                </a:solidFill>
-              </a:defRPr>
-            </a:pPr>
-            <a:r>
-              <a:t>📋 HORIZON 1 RICE METRICS BREAKDOWN</a:t>
+              <a:t>•  Ops Overhaul: Requires massive CapEx before validating customer demand.</a:t>
             </a:r>
           </a:p>
           <a:p>
@@ -9367,7 +9235,64 @@
               </a:defRPr>
             </a:pPr>
             <a:r>
-              <a:t>•  Reach: 9/10 — Touches every active grocery shopping cart on Zepto.</a:t>
+              <a:t>•  Trust-Led Sampling (MVP): 0-CapEx, 0-CAC trial delivered inside active grocery bags with grocery-linked rewards.</a:t>
+            </a:r>
+          </a:p>
+        </p:txBody>
+      </p:sp>
+      <p:sp>
+        <p:nvSpPr>
+          <p:cNvPr id="6" name="Rounded Rectangle 5"/>
+          <p:cNvSpPr/>
+          <p:nvPr/>
+        </p:nvSpPr>
+        <p:spPr>
+          <a:xfrm>
+            <a:off x="6291072" y="1755648"/>
+            <a:ext cx="5440680" cy="3474720"/>
+          </a:xfrm>
+          <a:prstGeom prst="roundRect">
+            <a:avLst/>
+          </a:prstGeom>
+          <a:solidFill>
+            <a:srgbClr val="1E1430"/>
+          </a:solidFill>
+          <a:ln w="19050">
+            <a:solidFill>
+              <a:srgbClr val="8224E3"/>
+            </a:solidFill>
+          </a:ln>
+        </p:spPr>
+        <p:style>
+          <a:lnRef idx="1">
+            <a:schemeClr val="accent1"/>
+          </a:lnRef>
+          <a:fillRef idx="3">
+            <a:schemeClr val="accent1"/>
+          </a:fillRef>
+          <a:effectRef idx="2">
+            <a:schemeClr val="accent1"/>
+          </a:effectRef>
+          <a:fontRef idx="minor">
+            <a:schemeClr val="lt1"/>
+          </a:fontRef>
+        </p:style>
+        <p:txBody>
+          <a:bodyPr rtlCol="0" anchor="ctr" wrap="square" lIns="164592" tIns="137160" rIns="164592" bIns="137160"/>
+          <a:lstStyle/>
+          <a:p>
+            <a:pPr algn="ctr">
+              <a:spcAft>
+                <a:spcPts val="600"/>
+              </a:spcAft>
+              <a:defRPr sz="1200" b="1">
+                <a:solidFill>
+                  <a:srgbClr val="FFD700"/>
+                </a:solidFill>
+              </a:defRPr>
+            </a:pPr>
+            <a:r>
+              <a:t>🏆 THREE STRATEGIC HORIZONS (RICE MATRIX)</a:t>
             </a:r>
           </a:p>
           <a:p>
@@ -9382,7 +9307,7 @@
               </a:defRPr>
             </a:pPr>
             <a:r>
-              <a:t>•  Impact: 10/10 — Solves dark-store quality fear, price match, and trial risk.</a:t>
+              <a:t>•  Horizon 1 (MVP) — Discovery Pass &amp; B2B Sampling: Brand-funded trial samples in grocery bags at Rs. 0 [0-CapEx, 0-CAC]. RICE: 210.0 [Illustrative].</a:t>
             </a:r>
           </a:p>
           <a:p>
@@ -9397,7 +9322,7 @@
               </a:defRPr>
             </a:pPr>
             <a:r>
-              <a:t>•  Confidence: 9/10 — Validated by N=22 cohort survey &amp; 2,000 scraped reviews.</a:t>
+              <a:t>•  Horizon 2 (Growth) — 15-Min Doorstep Swap &amp; Storage Audit: Reverse logistics rider replacement + dark store temperature telemetry [Operational CapEx]. RICE: 180.0 [Illustrative].</a:t>
             </a:r>
           </a:p>
           <a:p>
@@ -9412,7 +9337,7 @@
               </a:defRPr>
             </a:pPr>
             <a:r>
-              <a:t>•  Effort: 4/10 — Zero CapEx (B2B brand partners fund sample units).</a:t>
+              <a:t>•  Horizon 3 (Vision) — Category Quest Loyalty Engine: Multi-category streak board unlocking grocery point multipliers [RICE: 160.0].</a:t>
             </a:r>
           </a:p>
         </p:txBody>
@@ -9481,7 +9406,7 @@
               </a:defRPr>
             </a:pPr>
             <a:r>
-              <a:t>B2B Sampling requires zero capital expenditure (brands fund sample units) and leverages active grocery delivery bags for 0-CAC cross-category trial.</a:t>
+              <a:t>B2B Sampling requires zero capital expenditure (brands fund sample units) and addresses the core barrier (risk) right inside recurring grocery bags.</a:t>
             </a:r>
           </a:p>
         </p:txBody>
@@ -9528,7 +9453,7 @@
           <a:lstStyle/>
           <a:p>
             <a:pPr algn="ctr">
-              <a:defRPr sz="800" b="1">
+              <a:defRPr sz="950" b="1">
                 <a:solidFill>
                   <a:srgbClr val="AAA0BE"/>
                 </a:solidFill>
@@ -9582,14 +9507,14 @@
           <a:lstStyle/>
           <a:p>
             <a:pPr algn="ctr">
-              <a:defRPr sz="800" b="1">
+              <a:defRPr sz="950" b="1">
                 <a:solidFill>
                   <a:srgbClr val="AAA0BE"/>
                 </a:solidFill>
               </a:defRPr>
             </a:pPr>
             <a:r>
-              <a:t>Agent's Market</a:t>
+              <a:t>Market</a:t>
             </a:r>
           </a:p>
         </p:txBody>
@@ -9636,7 +9561,7 @@
           <a:lstStyle/>
           <a:p>
             <a:pPr algn="ctr">
-              <a:defRPr sz="800" b="1">
+              <a:defRPr sz="950" b="1">
                 <a:solidFill>
                   <a:srgbClr val="AAA0BE"/>
                 </a:solidFill>
@@ -9690,7 +9615,7 @@
           <a:lstStyle/>
           <a:p>
             <a:pPr algn="ctr">
-              <a:defRPr sz="800" b="1">
+              <a:defRPr sz="950" b="1">
                 <a:solidFill>
                   <a:srgbClr val="AAA0BE"/>
                 </a:solidFill>
@@ -9744,14 +9669,14 @@
           <a:lstStyle/>
           <a:p>
             <a:pPr algn="ctr">
-              <a:defRPr sz="800" b="1">
+              <a:defRPr sz="950" b="1">
                 <a:solidFill>
                   <a:srgbClr val="AAA0BE"/>
                 </a:solidFill>
               </a:defRPr>
             </a:pPr>
             <a:r>
-              <a:t>Problem Canvas</a:t>
+              <a:t>Canvas</a:t>
             </a:r>
           </a:p>
         </p:txBody>
@@ -9798,7 +9723,7 @@
           <a:lstStyle/>
           <a:p>
             <a:pPr algn="ctr">
-              <a:defRPr sz="800" b="1">
+              <a:defRPr sz="950" b="1">
                 <a:solidFill>
                   <a:srgbClr val="130D1E"/>
                 </a:solidFill>
@@ -9852,7 +9777,7 @@
           <a:lstStyle/>
           <a:p>
             <a:pPr algn="ctr">
-              <a:defRPr sz="800" b="1">
+              <a:defRPr sz="950" b="1">
                 <a:solidFill>
                   <a:srgbClr val="AAA0BE"/>
                 </a:solidFill>
@@ -9906,14 +9831,14 @@
           <a:lstStyle/>
           <a:p>
             <a:pPr algn="ctr">
-              <a:defRPr sz="800" b="1">
+              <a:defRPr sz="950" b="1">
                 <a:solidFill>
                   <a:srgbClr val="AAA0BE"/>
                 </a:solidFill>
               </a:defRPr>
             </a:pPr>
             <a:r>
-              <a:t>Journey</a:t>
+              <a:t>Architecture</a:t>
             </a:r>
           </a:p>
         </p:txBody>
@@ -9960,7 +9885,7 @@
           <a:lstStyle/>
           <a:p>
             <a:pPr algn="ctr">
-              <a:defRPr sz="800" b="1">
+              <a:defRPr sz="950" b="1">
                 <a:solidFill>
                   <a:srgbClr val="AAA0BE"/>
                 </a:solidFill>
@@ -10014,14 +9939,14 @@
           <a:lstStyle/>
           <a:p>
             <a:pPr algn="ctr">
-              <a:defRPr sz="800" b="1">
+              <a:defRPr sz="950" b="1">
                 <a:solidFill>
                   <a:srgbClr val="AAA0BE"/>
                 </a:solidFill>
               </a:defRPr>
             </a:pPr>
             <a:r>
-              <a:t>Risks + GTM</a:t>
+              <a:t>GTM</a:t>
             </a:r>
           </a:p>
         </p:txBody>
@@ -10138,7 +10063,7 @@
               </a:defRPr>
             </a:pPr>
             <a:r>
-              <a:t>  THE SOLUTION: DISCOVERY PASS, THE TRIAL LAYER FOR ZEPTO.</a:t>
+              <a:t>  MVP: RECOMMEND, DE-RISK, AND REWARD ADJACENT CATEGORY TRIALS</a:t>
             </a:r>
           </a:p>
         </p:txBody>
@@ -10169,14 +10094,14 @@
               <a:spcAft>
                 <a:spcPts val="200"/>
               </a:spcAft>
-              <a:defRPr sz="1800" b="1">
+              <a:defRPr sz="1750" b="1">
                 <a:solidFill>
                   <a:srgbClr val="FFFFFF"/>
                 </a:solidFill>
               </a:defRPr>
             </a:pPr>
             <a:r>
-              <a:t>7. MVP Product Solution: Complete Feature Suite Breakdown</a:t>
+              <a:t>7. De-Risked MVP Suite: Integrating AI Recommendations, Trust Cues, and Trial Incentives</a:t>
             </a:r>
           </a:p>
           <a:p>
@@ -10188,7 +10113,7 @@
               </a:defRPr>
             </a:pPr>
             <a:r>
-              <a:t>Showcasing all 6 built features converting grocery buyers to subscribers with Figma UI Mockup</a:t>
+              <a:t>Six built MVP capabilities convert routine grocery checkouts into trusted multi-category exploration.</a:t>
             </a:r>
           </a:p>
         </p:txBody>
@@ -10245,7 +10170,7 @@
               </a:defRPr>
             </a:pPr>
             <a:r>
-              <a:t>💎 BUILT FEATURES 1, 2 &amp; 3</a:t>
+              <a:t>💎 BUILT MVP CAPABILITIES 1, 2 &amp; 3</a:t>
             </a:r>
           </a:p>
           <a:p>
@@ -10260,7 +10185,7 @@
               </a:defRPr>
             </a:pPr>
             <a:r>
-              <a:t>•  1. 💎 B2B Free Trial Sampler: 1-click claim (Cetaphil, Pedigree, Portronics) inside grocery bag at Rs. 0.</a:t>
+              <a:t>•  1. 🧠 AI Recommendation &amp; Explainability: Recommends adjacent category with clear context ('Because you regularly buy breakfast staples and haven't tried personal care').</a:t>
             </a:r>
           </a:p>
           <a:p>
@@ -10275,7 +10200,7 @@
               </a:defRPr>
             </a:pPr>
             <a:r>
-              <a:t>•  2. 📦 Model B Storage Audit: Live dark-store IoT temp logs (18.2°C) &amp; automated CCTV rack snapshots ($15/mo AWS S3 cost).</a:t>
+              <a:t>•  2. 💎 0-CAC Trial Sample: Subscribers claim 1 free brand-sponsored sample (Cetaphil, Pedigree) in grocery bag at Rs. 0 [38% survey trigger, 9/24].</a:t>
             </a:r>
           </a:p>
           <a:p>
@@ -10290,7 +10215,7 @@
               </a:defRPr>
             </a:pPr>
             <a:r>
-              <a:t>•  3. 🏷️ DISCOVERY100 Voucher: Post-trial nudge unlocking Rs. 100 off full-size products.</a:t>
+              <a:t>•  3. 🏷️ Risk Reduction Voucher: Post-trial nudge unlocks Rs. 100 category voucher for full-size items.</a:t>
             </a:r>
           </a:p>
         </p:txBody>
@@ -10430,7 +10355,7 @@
           <a:lstStyle/>
           <a:p>
             <a:pPr algn="ctr">
-              <a:defRPr sz="800" b="1">
+              <a:defRPr sz="950" b="1">
                 <a:solidFill>
                   <a:srgbClr val="AAA0BE"/>
                 </a:solidFill>
@@ -10484,14 +10409,14 @@
           <a:lstStyle/>
           <a:p>
             <a:pPr algn="ctr">
-              <a:defRPr sz="800" b="1">
+              <a:defRPr sz="950" b="1">
                 <a:solidFill>
                   <a:srgbClr val="AAA0BE"/>
                 </a:solidFill>
               </a:defRPr>
             </a:pPr>
             <a:r>
-              <a:t>Agent's Market</a:t>
+              <a:t>Market</a:t>
             </a:r>
           </a:p>
         </p:txBody>
@@ -10538,7 +10463,7 @@
           <a:lstStyle/>
           <a:p>
             <a:pPr algn="ctr">
-              <a:defRPr sz="800" b="1">
+              <a:defRPr sz="950" b="1">
                 <a:solidFill>
                   <a:srgbClr val="AAA0BE"/>
                 </a:solidFill>
@@ -10592,7 +10517,7 @@
           <a:lstStyle/>
           <a:p>
             <a:pPr algn="ctr">
-              <a:defRPr sz="800" b="1">
+              <a:defRPr sz="950" b="1">
                 <a:solidFill>
                   <a:srgbClr val="AAA0BE"/>
                 </a:solidFill>
@@ -10646,14 +10571,14 @@
           <a:lstStyle/>
           <a:p>
             <a:pPr algn="ctr">
-              <a:defRPr sz="800" b="1">
+              <a:defRPr sz="950" b="1">
                 <a:solidFill>
                   <a:srgbClr val="AAA0BE"/>
                 </a:solidFill>
               </a:defRPr>
             </a:pPr>
             <a:r>
-              <a:t>Problem Canvas</a:t>
+              <a:t>Canvas</a:t>
             </a:r>
           </a:p>
         </p:txBody>
@@ -10700,7 +10625,7 @@
           <a:lstStyle/>
           <a:p>
             <a:pPr algn="ctr">
-              <a:defRPr sz="800" b="1">
+              <a:defRPr sz="950" b="1">
                 <a:solidFill>
                   <a:srgbClr val="AAA0BE"/>
                 </a:solidFill>
@@ -10754,7 +10679,7 @@
           <a:lstStyle/>
           <a:p>
             <a:pPr algn="ctr">
-              <a:defRPr sz="800" b="1">
+              <a:defRPr sz="950" b="1">
                 <a:solidFill>
                   <a:srgbClr val="130D1E"/>
                 </a:solidFill>
@@ -10808,14 +10733,14 @@
           <a:lstStyle/>
           <a:p>
             <a:pPr algn="ctr">
-              <a:defRPr sz="800" b="1">
+              <a:defRPr sz="950" b="1">
                 <a:solidFill>
                   <a:srgbClr val="AAA0BE"/>
                 </a:solidFill>
               </a:defRPr>
             </a:pPr>
             <a:r>
-              <a:t>Journey</a:t>
+              <a:t>Architecture</a:t>
             </a:r>
           </a:p>
         </p:txBody>
@@ -10862,7 +10787,7 @@
           <a:lstStyle/>
           <a:p>
             <a:pPr algn="ctr">
-              <a:defRPr sz="800" b="1">
+              <a:defRPr sz="950" b="1">
                 <a:solidFill>
                   <a:srgbClr val="AAA0BE"/>
                 </a:solidFill>
@@ -10916,14 +10841,14 @@
           <a:lstStyle/>
           <a:p>
             <a:pPr algn="ctr">
-              <a:defRPr sz="800" b="1">
+              <a:defRPr sz="950" b="1">
                 <a:solidFill>
                   <a:srgbClr val="AAA0BE"/>
                 </a:solidFill>
               </a:defRPr>
             </a:pPr>
             <a:r>
-              <a:t>Risks + GTM</a:t>
+              <a:t>GTM</a:t>
             </a:r>
           </a:p>
         </p:txBody>
@@ -11071,14 +10996,14 @@
               <a:spcAft>
                 <a:spcPts val="200"/>
               </a:spcAft>
-              <a:defRPr sz="1800" b="1">
+              <a:defRPr sz="1750" b="1">
                 <a:solidFill>
                   <a:srgbClr val="FFFFFF"/>
                 </a:solidFill>
               </a:defRPr>
             </a:pPr>
             <a:r>
-              <a:t>8. Technical Architecture &amp; End-to-End System Flow</a:t>
+              <a:t>8. Lightweight Decision Engine Allocates B2B Samples Without Adding Picking SLA Latency</a:t>
             </a:r>
           </a:p>
           <a:p>
@@ -11090,7 +11015,7 @@
               </a:defRPr>
             </a:pPr>
             <a:r>
-              <a:t>Behind-the-scenes logic powering sampling allocation, IoT telemetry, and loyalty points</a:t>
+              <a:t>Four-layer architecture integrates brand inventory, cart triggers, and loyalty ledgers.</a:t>
             </a:r>
           </a:p>
         </p:txBody>
@@ -11177,7 +11102,7 @@
               </a:defRPr>
             </a:pPr>
             <a:r>
-              <a:t>•  Layer 2 (Decision Engine): Persona Recommendation Engine, Voucher Validator, 2x Points Multiplier.</a:t>
+              <a:t>•  Layer 2 (Decision Engine): Persona Recommendation &amp; Explainability Engine, Voucher Validator, 2x Points Multiplier.</a:t>
             </a:r>
           </a:p>
           <a:p>
@@ -11192,7 +11117,7 @@
               </a:defRPr>
             </a:pPr>
             <a:r>
-              <a:t>•  Layer 3 (Operations &amp; IoT): Dark Store Temp Log API, CCTV Rack Snapshot Pipeline (AWS S3 7-day TTL).</a:t>
+              <a:t>•  Layer 3 (Operations &amp; Fulfillment): Picker packing checklist update (adds &lt;3s to picking flow; zero hardware requirement for MVP).</a:t>
             </a:r>
           </a:p>
           <a:p>
@@ -11207,7 +11132,7 @@
               </a:defRPr>
             </a:pPr>
             <a:r>
-              <a:t>•  Layer 4 (B2B Marketplace): Brand Sample Inventory Ledger (Cetaphil, Pedigree listing portal).</a:t>
+              <a:t>•  Layer 4 (B2B Marketplace Portal): Brand sample inventory ledger tracking sample distribution and conversion rates.</a:t>
             </a:r>
           </a:p>
         </p:txBody>
@@ -11279,7 +11204,7 @@
               </a:defRPr>
             </a:pPr>
             <a:r>
-              <a:t>•  Stage 1 (Cart): Types grocery staples → System flags persona → Curious</a:t>
+              <a:t>•  Stage 1 (Cart): Types grocery staples -&gt; System flags persona &amp; explainability nudge -&gt; Curious</a:t>
             </a:r>
           </a:p>
           <a:p>
@@ -11294,7 +11219,7 @@
               </a:defRPr>
             </a:pPr>
             <a:r>
-              <a:t>•  Stage 2 (Sample): Claims B2B trial → System packs in bag → Confident</a:t>
+              <a:t>•  Stage 2 (Sample): Claims B2B trial -&gt; System packs in bag -&gt; Confident</a:t>
             </a:r>
           </a:p>
           <a:p>
@@ -11309,7 +11234,7 @@
               </a:defRPr>
             </a:pPr>
             <a:r>
-              <a:t>•  Stage 3 (Audit): Opens Model B CCTV → System shows 18.2°C temp → Reassured</a:t>
+              <a:t>•  Stage 3 (Audit): Views storage quality badge -&gt; System verifies freshness -&gt; Reassured</a:t>
             </a:r>
           </a:p>
           <a:p>
@@ -11324,7 +11249,7 @@
               </a:defRPr>
             </a:pPr>
             <a:r>
-              <a:t>•  Stage 4 (Checkout): Applies DISCOVERY100 → System unlocks 2x Points → Empowered</a:t>
+              <a:t>•  Stage 4 (Checkout): Applies DISCOVERY100 -&gt; System unlocks 2x Points -&gt; Empowered</a:t>
             </a:r>
           </a:p>
         </p:txBody>
@@ -11393,7 +11318,7 @@
               </a:defRPr>
             </a:pPr>
             <a:r>
-              <a:t>AWS S3 lifecycle auto-deletion keeps photo storage under $15/month for all of India while dark-store picking speed stays under 60 seconds.</a:t>
+              <a:t>Zero hardware cost for MVP sampler. Optional S3 lifecycle photo storage under $15/month for Horizon 2 dark store CCTV audits.</a:t>
             </a:r>
           </a:p>
         </p:txBody>
@@ -11440,7 +11365,7 @@
           <a:lstStyle/>
           <a:p>
             <a:pPr algn="ctr">
-              <a:defRPr sz="800" b="1">
+              <a:defRPr sz="950" b="1">
                 <a:solidFill>
                   <a:srgbClr val="AAA0BE"/>
                 </a:solidFill>
@@ -11494,14 +11419,14 @@
           <a:lstStyle/>
           <a:p>
             <a:pPr algn="ctr">
-              <a:defRPr sz="800" b="1">
+              <a:defRPr sz="950" b="1">
                 <a:solidFill>
                   <a:srgbClr val="AAA0BE"/>
                 </a:solidFill>
               </a:defRPr>
             </a:pPr>
             <a:r>
-              <a:t>Agent's Market</a:t>
+              <a:t>Market</a:t>
             </a:r>
           </a:p>
         </p:txBody>
@@ -11548,7 +11473,7 @@
           <a:lstStyle/>
           <a:p>
             <a:pPr algn="ctr">
-              <a:defRPr sz="800" b="1">
+              <a:defRPr sz="950" b="1">
                 <a:solidFill>
                   <a:srgbClr val="AAA0BE"/>
                 </a:solidFill>
@@ -11602,7 +11527,7 @@
           <a:lstStyle/>
           <a:p>
             <a:pPr algn="ctr">
-              <a:defRPr sz="800" b="1">
+              <a:defRPr sz="950" b="1">
                 <a:solidFill>
                   <a:srgbClr val="AAA0BE"/>
                 </a:solidFill>
@@ -11656,14 +11581,14 @@
           <a:lstStyle/>
           <a:p>
             <a:pPr algn="ctr">
-              <a:defRPr sz="800" b="1">
+              <a:defRPr sz="950" b="1">
                 <a:solidFill>
                   <a:srgbClr val="AAA0BE"/>
                 </a:solidFill>
               </a:defRPr>
             </a:pPr>
             <a:r>
-              <a:t>Problem Canvas</a:t>
+              <a:t>Canvas</a:t>
             </a:r>
           </a:p>
         </p:txBody>
@@ -11710,7 +11635,7 @@
           <a:lstStyle/>
           <a:p>
             <a:pPr algn="ctr">
-              <a:defRPr sz="800" b="1">
+              <a:defRPr sz="950" b="1">
                 <a:solidFill>
                   <a:srgbClr val="AAA0BE"/>
                 </a:solidFill>
@@ -11764,7 +11689,7 @@
           <a:lstStyle/>
           <a:p>
             <a:pPr algn="ctr">
-              <a:defRPr sz="800" b="1">
+              <a:defRPr sz="950" b="1">
                 <a:solidFill>
                   <a:srgbClr val="AAA0BE"/>
                 </a:solidFill>
@@ -11818,14 +11743,14 @@
           <a:lstStyle/>
           <a:p>
             <a:pPr algn="ctr">
-              <a:defRPr sz="800" b="1">
+              <a:defRPr sz="950" b="1">
                 <a:solidFill>
                   <a:srgbClr val="130D1E"/>
                 </a:solidFill>
               </a:defRPr>
             </a:pPr>
             <a:r>
-              <a:t>Journey</a:t>
+              <a:t>Architecture</a:t>
             </a:r>
           </a:p>
         </p:txBody>
@@ -11872,7 +11797,7 @@
           <a:lstStyle/>
           <a:p>
             <a:pPr algn="ctr">
-              <a:defRPr sz="800" b="1">
+              <a:defRPr sz="950" b="1">
                 <a:solidFill>
                   <a:srgbClr val="AAA0BE"/>
                 </a:solidFill>
@@ -11926,14 +11851,14 @@
           <a:lstStyle/>
           <a:p>
             <a:pPr algn="ctr">
-              <a:defRPr sz="800" b="1">
+              <a:defRPr sz="950" b="1">
                 <a:solidFill>
                   <a:srgbClr val="AAA0BE"/>
                 </a:solidFill>
               </a:defRPr>
             </a:pPr>
             <a:r>
-              <a:t>Risks + GTM</a:t>
+              <a:t>GTM</a:t>
             </a:r>
           </a:p>
         </p:txBody>
@@ -12081,14 +12006,14 @@
               <a:spcAft>
                 <a:spcPts val="200"/>
               </a:spcAft>
-              <a:defRPr sz="1800" b="1">
+              <a:defRPr sz="1750" b="1">
                 <a:solidFill>
                   <a:srgbClr val="FFFFFF"/>
                 </a:solidFill>
               </a:defRPr>
             </a:pPr>
             <a:r>
-              <a:t>9. Success Metrics &amp; 12-Month Trajectory (MCER: 8.2% → 28.4%)</a:t>
+              <a:t>9. Success Is Measured by Monthly Category Exploration Rate (MCER) &amp; De-Risked Conversion</a:t>
             </a:r>
           </a:p>
           <a:p>
@@ -12100,7 +12025,7 @@
               </a:defRPr>
             </a:pPr>
             <a:r>
-              <a:t>Targeting 3.5x expansion in cross-category monthly active customers</a:t>
+              <a:t>North Star metric supported by leading indicators, conversion funnels, and SLA guardrails.</a:t>
             </a:r>
           </a:p>
         </p:txBody>
@@ -12157,7 +12082,7 @@
               </a:defRPr>
             </a:pPr>
             <a:r>
-              <a:t>⭐ NORTH STAR METRIC (MCER)</a:t>
+              <a:t>⭐ NORTH STAR &amp; LEADING INDICATORS</a:t>
             </a:r>
           </a:p>
           <a:p>
@@ -12172,7 +12097,7 @@
               </a:defRPr>
             </a:pPr>
             <a:r>
-              <a:t>•  Monthly Category Exploration Rate (MCER): % of MACs purchasing from 2+ categories/month.</a:t>
+              <a:t>•  North Star Metric: Monthly Category Exploration Rate (MCER) — % of MACs purchasing from 2+ categories/month.</a:t>
             </a:r>
           </a:p>
           <a:p>
@@ -12187,64 +12112,7 @@
               </a:defRPr>
             </a:pPr>
             <a:r>
-              <a:t>•  Baseline: 8.2% → Month 3 (Pilot): 14.5% → Month 6 (Metro): 21.0% → Month 12 Target: 28.4%</a:t>
-            </a:r>
-          </a:p>
-        </p:txBody>
-      </p:sp>
-      <p:sp>
-        <p:nvSpPr>
-          <p:cNvPr id="6" name="Rounded Rectangle 5"/>
-          <p:cNvSpPr/>
-          <p:nvPr/>
-        </p:nvSpPr>
-        <p:spPr>
-          <a:xfrm>
-            <a:off x="6291072" y="1755648"/>
-            <a:ext cx="5440680" cy="3474720"/>
-          </a:xfrm>
-          <a:prstGeom prst="roundRect">
-            <a:avLst/>
-          </a:prstGeom>
-          <a:solidFill>
-            <a:srgbClr val="1E1430"/>
-          </a:solidFill>
-          <a:ln w="19050">
-            <a:solidFill>
-              <a:srgbClr val="8224E3"/>
-            </a:solidFill>
-          </a:ln>
-        </p:spPr>
-        <p:style>
-          <a:lnRef idx="1">
-            <a:schemeClr val="accent1"/>
-          </a:lnRef>
-          <a:fillRef idx="3">
-            <a:schemeClr val="accent1"/>
-          </a:fillRef>
-          <a:effectRef idx="2">
-            <a:schemeClr val="accent1"/>
-          </a:effectRef>
-          <a:fontRef idx="minor">
-            <a:schemeClr val="lt1"/>
-          </a:fontRef>
-        </p:style>
-        <p:txBody>
-          <a:bodyPr rtlCol="0" anchor="ctr" wrap="square" lIns="164592" tIns="137160" rIns="164592" bIns="137160"/>
-          <a:lstStyle/>
-          <a:p>
-            <a:pPr algn="ctr">
-              <a:spcAft>
-                <a:spcPts val="600"/>
-              </a:spcAft>
-              <a:defRPr sz="1200" b="1">
-                <a:solidFill>
-                  <a:srgbClr val="FFD700"/>
-                </a:solidFill>
-              </a:defRPr>
-            </a:pPr>
-            <a:r>
-              <a:t>🛡️ OPERATIONAL GUARDRAIL METRICS</a:t>
+              <a:t>•  • Baseline: 8.2% MAC -&gt; Target: 28.4% MAC in 12 months [Illustrative Trajectory Target].</a:t>
             </a:r>
           </a:p>
           <a:p>
@@ -12259,7 +12127,64 @@
               </a:defRPr>
             </a:pPr>
             <a:r>
-              <a:t>•  Picker SLA Floor: Dark-store picking speed must stay below 60s (CCTV adds 0s delay).</a:t>
+              <a:t>•  Leading Indicators: Sample attach rate to grocery carts (target &gt;35%), Trust-cue interaction CTR, Sample-to-full-size conversion (target 12% in 14 days), % users redeeming grocery-linked point streak.</a:t>
+            </a:r>
+          </a:p>
+        </p:txBody>
+      </p:sp>
+      <p:sp>
+        <p:nvSpPr>
+          <p:cNvPr id="6" name="Rounded Rectangle 5"/>
+          <p:cNvSpPr/>
+          <p:nvPr/>
+        </p:nvSpPr>
+        <p:spPr>
+          <a:xfrm>
+            <a:off x="6291072" y="1755648"/>
+            <a:ext cx="5440680" cy="3474720"/>
+          </a:xfrm>
+          <a:prstGeom prst="roundRect">
+            <a:avLst/>
+          </a:prstGeom>
+          <a:solidFill>
+            <a:srgbClr val="1E1430"/>
+          </a:solidFill>
+          <a:ln w="19050">
+            <a:solidFill>
+              <a:srgbClr val="8224E3"/>
+            </a:solidFill>
+          </a:ln>
+        </p:spPr>
+        <p:style>
+          <a:lnRef idx="1">
+            <a:schemeClr val="accent1"/>
+          </a:lnRef>
+          <a:fillRef idx="3">
+            <a:schemeClr val="accent1"/>
+          </a:fillRef>
+          <a:effectRef idx="2">
+            <a:schemeClr val="accent1"/>
+          </a:effectRef>
+          <a:fontRef idx="minor">
+            <a:schemeClr val="lt1"/>
+          </a:fontRef>
+        </p:style>
+        <p:txBody>
+          <a:bodyPr rtlCol="0" anchor="ctr" wrap="square" lIns="164592" tIns="137160" rIns="164592" bIns="137160"/>
+          <a:lstStyle/>
+          <a:p>
+            <a:pPr algn="ctr">
+              <a:spcAft>
+                <a:spcPts val="600"/>
+              </a:spcAft>
+              <a:defRPr sz="1200" b="1">
+                <a:solidFill>
+                  <a:srgbClr val="FFD700"/>
+                </a:solidFill>
+              </a:defRPr>
+            </a:pPr>
+            <a:r>
+              <a:t>🛡️ OPERATIONAL GUARDRAIL METRICS</a:t>
             </a:r>
           </a:p>
           <a:p>
@@ -12274,7 +12199,7 @@
               </a:defRPr>
             </a:pPr>
             <a:r>
-              <a:t>•  S3 Cloud Cost Ceiling: AWS S3 photo storage capped below $20/month via 7-day TTL rules.</a:t>
+              <a:t>•  Picker SLA Floor: Dark-store sample packing time addition capped at &lt;3 seconds per order.</a:t>
             </a:r>
           </a:p>
           <a:p>
@@ -12289,7 +12214,37 @@
               </a:defRPr>
             </a:pPr>
             <a:r>
-              <a:t>•  Checkout Drop-off Cap: Sample selection interaction must not increase cart drop-off (&gt;0.2%).</a:t>
+              <a:t>•  Checkout Drop-off Cap: Sample selection interaction must not increase cart drop-off rate (&gt;0.2%).</a:t>
+            </a:r>
+          </a:p>
+          <a:p>
+            <a:pPr>
+              <a:spcAft>
+                <a:spcPts val="400"/>
+              </a:spcAft>
+              <a:defRPr sz="950">
+                <a:solidFill>
+                  <a:srgbClr val="E2D9F3"/>
+                </a:solidFill>
+              </a:defRPr>
+            </a:pPr>
+            <a:r>
+              <a:t>•  Refund Rate Ceiling: Doorstep replacement requests must remain below 1.5% of non-grocery orders.</a:t>
+            </a:r>
+          </a:p>
+          <a:p>
+            <a:pPr>
+              <a:spcAft>
+                <a:spcPts val="400"/>
+              </a:spcAft>
+              <a:defRPr sz="950">
+                <a:solidFill>
+                  <a:srgbClr val="E2D9F3"/>
+                </a:solidFill>
+              </a:defRPr>
+            </a:pPr>
+            <a:r>
+              <a:t>•  S3 Cloud Cost Ceiling: AWS S3 photo storage capped below $20/month via 7-day TTL rules (for Horizon 2 expansion).</a:t>
             </a:r>
           </a:p>
         </p:txBody>
@@ -12405,7 +12360,7 @@
           <a:lstStyle/>
           <a:p>
             <a:pPr algn="ctr">
-              <a:defRPr sz="800" b="1">
+              <a:defRPr sz="950" b="1">
                 <a:solidFill>
                   <a:srgbClr val="AAA0BE"/>
                 </a:solidFill>
@@ -12459,14 +12414,14 @@
           <a:lstStyle/>
           <a:p>
             <a:pPr algn="ctr">
-              <a:defRPr sz="800" b="1">
+              <a:defRPr sz="950" b="1">
                 <a:solidFill>
                   <a:srgbClr val="AAA0BE"/>
                 </a:solidFill>
               </a:defRPr>
             </a:pPr>
             <a:r>
-              <a:t>Agent's Market</a:t>
+              <a:t>Market</a:t>
             </a:r>
           </a:p>
         </p:txBody>
@@ -12513,7 +12468,7 @@
           <a:lstStyle/>
           <a:p>
             <a:pPr algn="ctr">
-              <a:defRPr sz="800" b="1">
+              <a:defRPr sz="950" b="1">
                 <a:solidFill>
                   <a:srgbClr val="AAA0BE"/>
                 </a:solidFill>
@@ -12567,7 +12522,7 @@
           <a:lstStyle/>
           <a:p>
             <a:pPr algn="ctr">
-              <a:defRPr sz="800" b="1">
+              <a:defRPr sz="950" b="1">
                 <a:solidFill>
                   <a:srgbClr val="AAA0BE"/>
                 </a:solidFill>
@@ -12621,14 +12576,14 @@
           <a:lstStyle/>
           <a:p>
             <a:pPr algn="ctr">
-              <a:defRPr sz="800" b="1">
+              <a:defRPr sz="950" b="1">
                 <a:solidFill>
                   <a:srgbClr val="AAA0BE"/>
                 </a:solidFill>
               </a:defRPr>
             </a:pPr>
             <a:r>
-              <a:t>Problem Canvas</a:t>
+              <a:t>Canvas</a:t>
             </a:r>
           </a:p>
         </p:txBody>
@@ -12675,7 +12630,7 @@
           <a:lstStyle/>
           <a:p>
             <a:pPr algn="ctr">
-              <a:defRPr sz="800" b="1">
+              <a:defRPr sz="950" b="1">
                 <a:solidFill>
                   <a:srgbClr val="AAA0BE"/>
                 </a:solidFill>
@@ -12729,7 +12684,7 @@
           <a:lstStyle/>
           <a:p>
             <a:pPr algn="ctr">
-              <a:defRPr sz="800" b="1">
+              <a:defRPr sz="950" b="1">
                 <a:solidFill>
                   <a:srgbClr val="AAA0BE"/>
                 </a:solidFill>
@@ -12783,14 +12738,14 @@
           <a:lstStyle/>
           <a:p>
             <a:pPr algn="ctr">
-              <a:defRPr sz="800" b="1">
+              <a:defRPr sz="950" b="1">
                 <a:solidFill>
                   <a:srgbClr val="AAA0BE"/>
                 </a:solidFill>
               </a:defRPr>
             </a:pPr>
             <a:r>
-              <a:t>Journey</a:t>
+              <a:t>Architecture</a:t>
             </a:r>
           </a:p>
         </p:txBody>
@@ -12837,7 +12792,7 @@
           <a:lstStyle/>
           <a:p>
             <a:pPr algn="ctr">
-              <a:defRPr sz="800" b="1">
+              <a:defRPr sz="950" b="1">
                 <a:solidFill>
                   <a:srgbClr val="130D1E"/>
                 </a:solidFill>
@@ -12891,14 +12846,14 @@
           <a:lstStyle/>
           <a:p>
             <a:pPr algn="ctr">
-              <a:defRPr sz="800" b="1">
+              <a:defRPr sz="950" b="1">
                 <a:solidFill>
                   <a:srgbClr val="AAA0BE"/>
                 </a:solidFill>
               </a:defRPr>
             </a:pPr>
             <a:r>
-              <a:t>Risks + GTM</a:t>
+              <a:t>GTM</a:t>
             </a:r>
           </a:p>
         </p:txBody>

--- a/Zepto_Growth_PM_Graduation_Project.pptx
+++ b/Zepto_Growth_PM_Graduation_Project.pptx
@@ -3229,7 +3229,7 @@
               </a:defRPr>
             </a:pPr>
             <a:r>
-              <a:t>1. Context &amp; Business Goal: Converting Daily Grocery Habits into Low-Risk Non-Grocery Trial</a:t>
+              <a:t>1. Zepto Expands Blended Gross Margin (+300bps) by Converting Daily Grocery Habits into Recurring Multi-Category Buying</a:t>
             </a:r>
           </a:p>
           <a:p>
@@ -4201,7 +4201,7 @@
               </a:defRPr>
             </a:pPr>
             <a:r>
-              <a:t>  DISCOVERY PASS TURNS HESITATION INTO REPEATED, TRUSTED RUNS AND SCALES NEXT-TIER ARR.</a:t>
+              <a:t>  NON-SAMPLEABLE CEILINGS &amp; PHASED ROLLOUT ROADMAP</a:t>
             </a:r>
           </a:p>
         </p:txBody>
@@ -4239,7 +4239,7 @@
               </a:defRPr>
             </a:pPr>
             <a:r>
-              <a:t>10. Brand-Sponsored Listing Fees Fund Sampling Operations While Category Streaks Drive Retention</a:t>
+              <a:t>10. Phased Rollout Overcomes Sample Supply Ceilings via Instant Try-and-Return in Non-Sampleable Categories</a:t>
             </a:r>
           </a:p>
           <a:p>
@@ -4251,7 +4251,7 @@
               </a:defRPr>
             </a:pPr>
             <a:r>
-              <a:t>Phased rollout strategy mitigates inventory risk and validates unit economics.</a:t>
+              <a:t>Addressing high-ticket non-sampleable categories via instant try-and-return while monetizing brand attribution.</a:t>
             </a:r>
           </a:p>
         </p:txBody>
@@ -4308,7 +4308,7 @@
               </a:defRPr>
             </a:pPr>
             <a:r>
-              <a:t>🚀 3-PHASE ROLLOUT &amp; MONETIZATION</a:t>
+              <a:t>🚀 3-PHASE ROLLOUT &amp; NON-SAMPLEABLE STRATEGY</a:t>
             </a:r>
           </a:p>
           <a:p>
@@ -4323,7 +4323,7 @@
               </a:defRPr>
             </a:pPr>
             <a:r>
-              <a:t>•  Phase 1 (Beta): 30-day pilot across 10 dark stores in Bangalore with 2 FMCG brand partners.</a:t>
+              <a:t>•  Non-Sampleable Strategy: High-ticket items (Electronics, Baby Gear) bypass sampling via 10-min Instant Try-and-Return.</a:t>
             </a:r>
           </a:p>
           <a:p>
@@ -4338,7 +4338,7 @@
               </a:defRPr>
             </a:pPr>
             <a:r>
-              <a:t>•  Phase 2 (Pro Rollout): Metro rollout across Mumbai, Delhi-NCR, and Bangalore (150 dark stores).</a:t>
+              <a:t>•  Phase 1 (Beta): 30-day pilot across 10 dark stores in Bangalore with 2 FMCG brand partners.</a:t>
             </a:r>
           </a:p>
           <a:p>
@@ -4353,7 +4353,7 @@
               </a:defRPr>
             </a:pPr>
             <a:r>
-              <a:t>•  Phase 3 (GA): Full network rollout across 500+ dark store hubs.</a:t>
+              <a:t>•  Phase 2 (Pro Rollout): Metro rollout across Mumbai, Delhi-NCR, and Bangalore (150 dark stores).</a:t>
             </a:r>
           </a:p>
           <a:p>
@@ -4368,7 +4368,7 @@
               </a:defRPr>
             </a:pPr>
             <a:r>
-              <a:t>•  Monetization: Rs. 59/mo Pass + B2B Brand Listing Fees (Brands pay Rs. 15 per distributed sample) [Illustrative Assumption].</a:t>
+              <a:t>•  Phase 3 (GA): Full network rollout across 500+ dark store hubs.</a:t>
             </a:r>
           </a:p>
         </p:txBody>
@@ -5211,7 +5211,7 @@
               </a:defRPr>
             </a:pPr>
             <a:r>
-              <a:t>  FAST EMERGENCY UTILITY VS TRUSTED PLANNED DESTINATION</a:t>
+              <a:t>  CONVENIENCE-JUSTIFIED TOP-UPS VS PLANNED BULK BUYS</a:t>
             </a:r>
           </a:p>
         </p:txBody>
@@ -5249,7 +5249,7 @@
               </a:defRPr>
             </a:pPr>
             <a:r>
-              <a:t>2. Frequent Grocery Users Buy Planned Non-Grocery Items Elsewhere Due to Lack of Trust &amp; Risk-Free Trial</a:t>
+              <a:t>2. Users Leak Planned Non-Grocery Spending to Amazon/DMart; Phase 1 Targets Convenience-Justified Small Baskets, Not Bulk Buys</a:t>
             </a:r>
           </a:p>
           <a:p>
@@ -5261,7 +5261,7 @@
               </a:defRPr>
             </a:pPr>
             <a:r>
-              <a:t>Frequent grocery users do not expand into non-grocery categories because QCommerce is perceived as a fast emergency utility.</a:t>
+              <a:t>Conceding planned bulk buys (10kg pet food, 50-pack diapers); targeting convenience-justified top-ups where QCommerce wins.</a:t>
             </a:r>
           </a:p>
         </p:txBody>
@@ -5420,7 +5420,7 @@
               </a:defRPr>
             </a:pPr>
             <a:r>
-              <a:t>❌ WHAT NOBODY HAS SOLVED (THE PURCHASING LEAKAGE)</a:t>
+              <a:t>❌ PURCHASING LEAKAGE &amp; SCOPE CONCESSION</a:t>
             </a:r>
           </a:p>
           <a:p>
@@ -5450,7 +5450,7 @@
               </a:defRPr>
             </a:pPr>
             <a:r>
-              <a:t>•  Quality &amp; Expiry Fear: 20.1% of discovery subset (134/667) fear heat degrades dark store inventory [Synthetic Corpus, 667 subset].</a:t>
+              <a:t>•  Explicit Scope Concession: We do NOT chase planned bulk buys (10kg pet kibble, jumbo diapers) in Phase 1 where DMart wins on unit economics.</a:t>
             </a:r>
           </a:p>
           <a:p>
@@ -5465,7 +5465,7 @@
               </a:defRPr>
             </a:pPr>
             <a:r>
-              <a:t>•  Return &amp; Refund Anxiety: 17% of surveyed users (4/24) cite refund chatbot loops as top barrier [User Survey Q4, N=24].</a:t>
+              <a:t>•  Phase 1 Target SKUs: Convenience-justified, impulse-friendly top-ups (single face serum, pet treats, travel grooming, batteries) where 10-min speed wins.</a:t>
             </a:r>
           </a:p>
           <a:p>
@@ -5480,7 +5480,7 @@
               </a:defRPr>
             </a:pPr>
             <a:r>
-              <a:t>•  Risk-Free Product Sampling: 0-CAC sampling moat completely unaddressed by incumbent ad banners.</a:t>
+              <a:t>•  Trust &amp; Quality Friction: 20.1% of discovery reviews (134/667) fear heat degrades dark store items; 17% (4/24) fear refund bot loops.</a:t>
             </a:r>
           </a:p>
         </p:txBody>
@@ -6244,7 +6244,7 @@
               </a:defRPr>
             </a:pPr>
             <a:r>
-              <a:t>3. AI Review Pipeline Identified Recurring Barriers, Then Primary Research Validated 3 Core Blocker Buckets</a:t>
+              <a:t>3. Synthetic Review Corpus &amp; Primary Survey Isolate 3 Core Barriers: Trust, Purchase-Mode Mismatch, and Low Salience</a:t>
             </a:r>
           </a:p>
           <a:p>
@@ -7224,7 +7224,7 @@
               </a:defRPr>
             </a:pPr>
             <a:r>
-              <a:t>4. Target Segment: High-Frequency Grocery Users Open to Low-Risk Adjacent Category Trials</a:t>
+              <a:t>4. High-Frequency Grocery Refillers (79% Weekly+) Form the Prime Wedge to Intercept Planned Non-Grocery Restocks</a:t>
             </a:r>
           </a:p>
           <a:p>
@@ -7236,7 +7236,7 @@
               </a:defRPr>
             </a:pPr>
             <a:r>
-              <a:t>Targeting retained grocery refuelers who already trust Zepto for daily essentials but buy non-groceries elsewhere.</a:t>
+              <a:t>Targeting retained grocery refuelers and using grocery cadence to intercept Amazon purchases 2 days before restock.</a:t>
             </a:r>
           </a:p>
         </p:txBody>
@@ -7338,7 +7338,7 @@
               </a:defRPr>
             </a:pPr>
             <a:r>
-              <a:t>•  Behavioral Obstacle: Code quick-commerce strictly as an urgent emergency utility, avoiding non-grocery items due to perceived quality risk.</a:t>
+              <a:t>•  Predictive Restock Interception: Grocery restock cadence predicts non-grocery replenishment timing, triggering prompts 2 days before Amazon order.</a:t>
             </a:r>
           </a:p>
         </p:txBody>
@@ -8088,7 +8088,7 @@
               </a:defRPr>
             </a:pPr>
             <a:r>
-              <a:t>  GROCERIES BUILD DAILY RETENTION. NON-GROCERIES BUILD PROFIT MARGINS.</a:t>
+              <a:t>  SUPPLY-SIDE MONETIZATION &amp; UNIT ECONOMICS RIGOR</a:t>
             </a:r>
           </a:p>
         </p:txBody>
@@ -8126,7 +8126,7 @@
               </a:defRPr>
             </a:pPr>
             <a:r>
-              <a:t>5. Eliminating Trial Barriers Converts High-Frequency Grocery Traffic into High-Margin LTV</a:t>
+              <a:t>5. Brand-Funded Monetization Yields Positive Unit Economics with Immediate Payback on Cross-Category LTV</a:t>
             </a:r>
           </a:p>
           <a:p>
@@ -8138,7 +8138,7 @@
               </a:defRPr>
             </a:pPr>
             <a:r>
-              <a:t>Financial flywheel model driven by zero-CAC sampling and loyalty point cross-subsidization.</a:t>
+              <a:t>100% free for users (no paywall); FMCG brands fund trial samples for closed-loop conversion attribution.</a:t>
             </a:r>
           </a:p>
         </p:txBody>
@@ -8297,7 +8297,7 @@
               </a:defRPr>
             </a:pPr>
             <a:r>
-              <a:t>🎯 VALIDATED CONVERSION LEVERS (N=24)</a:t>
+              <a:t>💰 UNIT ECONOMICS &amp; CONVERSION LEVERS (N=24)</a:t>
             </a:r>
           </a:p>
           <a:p>
@@ -8312,7 +8312,7 @@
               </a:defRPr>
             </a:pPr>
             <a:r>
-              <a:t>•  Risk-Free Trial: 38% of survey respondents (9/24) state a free trial sample in their bag would drive new category trial.</a:t>
+              <a:t>•  100% Free User Access: No user paywall (suppresses funnel). Monetized via B2B brand listing fee (+Rs. 15/sample).</a:t>
             </a:r>
           </a:p>
           <a:p>
@@ -8327,7 +8327,7 @@
               </a:defRPr>
             </a:pPr>
             <a:r>
-              <a:t>•  Loyalty Lock-In: 63% of survey respondents (15/24) prefer loyalty points tied to daily essentials unlocked by trying new categories.</a:t>
+              <a:t>•  Unit Economics per Sample: Brand Fee (+Rs. 15) - Pack/Fulfill Cost (-Rs. 4) = Net Surplus (+Rs. 11/trial).</a:t>
             </a:r>
           </a:p>
           <a:p>
@@ -8342,7 +8342,22 @@
               </a:defRPr>
             </a:pPr>
             <a:r>
-              <a:t>•  Rider Swap Trust: 92% of survey respondents (22/24) rate a 15-minute doorstep swap guarantee between 3.0 and 5.0 on trust impact.</a:t>
+              <a:t>•  Incremental Customer LTV: +Rs. 420/year from converted 2+ category buyers -&gt; Immediate Payback (&lt;1st order).</a:t>
+            </a:r>
+          </a:p>
+          <a:p>
+            <a:pPr>
+              <a:spcAft>
+                <a:spcPts val="400"/>
+              </a:spcAft>
+              <a:defRPr sz="950">
+                <a:solidFill>
+                  <a:srgbClr val="E2D9F3"/>
+                </a:solidFill>
+              </a:defRPr>
+            </a:pPr>
+            <a:r>
+              <a:t>•  Validated Triggers: 38% trial via sample (9/24), 63% loyalty link (15/24), 92% doorstep swap trust (22/24).</a:t>
             </a:r>
           </a:p>
         </p:txBody>
@@ -9068,7 +9083,7 @@
               </a:defRPr>
             </a:pPr>
             <a:r>
-              <a:t>  STRATEGIC ALTERNATIVES &amp; PRIORITIZATION MATRIX</a:t>
+              <a:t>  COMPOUNDING DATA FLYWHEEL VS COPIABLE PROMOS</a:t>
             </a:r>
           </a:p>
         </p:txBody>
@@ -9106,7 +9121,7 @@
               </a:defRPr>
             </a:pPr>
             <a:r>
-              <a:t>6. Strategic Comparison: Why Trust-Led In-Bag Sampling Beats Ad Banners &amp; Discounting</a:t>
+              <a:t>6. Zepto's Defensibility Lies in its First-Party Purchase-Graph Flywheel and Closed-Loop Brand Attribution, Not Copiable Promos</a:t>
             </a:r>
           </a:p>
           <a:p>
@@ -9118,7 +9133,7 @@
               </a:defRPr>
             </a:pPr>
             <a:r>
-              <a:t>Comparing alternative growth levers demonstrates why in-bag trial provides the highest impact at lowest effort.</a:t>
+              <a:t>Promos and swap policies are copiable; first-party purchase graphs and B2B attribution create true defensibility.</a:t>
             </a:r>
           </a:p>
         </p:txBody>
@@ -9175,7 +9190,7 @@
               </a:defRPr>
             </a:pPr>
             <a:r>
-              <a:t>⚡ ALTERNATIVES VS TRUST-LED SAMPLING</a:t>
+              <a:t>⚡ TRIVIALLY COPIABLE VS COMPOUNDING MOATS</a:t>
             </a:r>
           </a:p>
           <a:p>
@@ -9190,7 +9205,7 @@
               </a:defRPr>
             </a:pPr>
             <a:r>
-              <a:t>•  Homepage Banners: Ignored due to impulse fatigue (20.1% review subset); zero impact on trust.</a:t>
+              <a:t>•  Trivially Copiable Promos: Free samples, coupons, and 15-min swap policies can be copied by Blinkit/Instamart in a week.</a:t>
             </a:r>
           </a:p>
           <a:p>
@@ -9205,7 +9220,7 @@
               </a:defRPr>
             </a:pPr>
             <a:r>
-              <a:t>•  Broad Discounting: Destroys unit margins without addressing quality/expiry fears.</a:t>
+              <a:t>•  Compounding Data Moat 1: Zepto's first-party grocery purchase graph predicts adjacent category readiness and restock timing.</a:t>
             </a:r>
           </a:p>
           <a:p>
@@ -9220,7 +9235,64 @@
               </a:defRPr>
             </a:pPr>
             <a:r>
-              <a:t>•  Ops Overhaul: Requires massive CapEx before validating customer demand.</a:t>
+              <a:t>•  Compounding Brand Moat 2: Closed-loop brand attribution showing FMCG brands cohort-level sample-to-full-size conversion rates.</a:t>
+            </a:r>
+          </a:p>
+        </p:txBody>
+      </p:sp>
+      <p:sp>
+        <p:nvSpPr>
+          <p:cNvPr id="6" name="Rounded Rectangle 5"/>
+          <p:cNvSpPr/>
+          <p:nvPr/>
+        </p:nvSpPr>
+        <p:spPr>
+          <a:xfrm>
+            <a:off x="6291072" y="1755648"/>
+            <a:ext cx="5440680" cy="3474720"/>
+          </a:xfrm>
+          <a:prstGeom prst="roundRect">
+            <a:avLst/>
+          </a:prstGeom>
+          <a:solidFill>
+            <a:srgbClr val="1E1430"/>
+          </a:solidFill>
+          <a:ln w="19050">
+            <a:solidFill>
+              <a:srgbClr val="8224E3"/>
+            </a:solidFill>
+          </a:ln>
+        </p:spPr>
+        <p:style>
+          <a:lnRef idx="1">
+            <a:schemeClr val="accent1"/>
+          </a:lnRef>
+          <a:fillRef idx="3">
+            <a:schemeClr val="accent1"/>
+          </a:fillRef>
+          <a:effectRef idx="2">
+            <a:schemeClr val="accent1"/>
+          </a:effectRef>
+          <a:fontRef idx="minor">
+            <a:schemeClr val="lt1"/>
+          </a:fontRef>
+        </p:style>
+        <p:txBody>
+          <a:bodyPr rtlCol="0" anchor="ctr" wrap="square" lIns="164592" tIns="137160" rIns="164592" bIns="137160"/>
+          <a:lstStyle/>
+          <a:p>
+            <a:pPr algn="ctr">
+              <a:spcAft>
+                <a:spcPts val="600"/>
+              </a:spcAft>
+              <a:defRPr sz="1200" b="1">
+                <a:solidFill>
+                  <a:srgbClr val="FFD700"/>
+                </a:solidFill>
+              </a:defRPr>
+            </a:pPr>
+            <a:r>
+              <a:t>🏆 THREE STRATEGIC HORIZONS (RICE MATRIX)</a:t>
             </a:r>
           </a:p>
           <a:p>
@@ -9235,64 +9307,7 @@
               </a:defRPr>
             </a:pPr>
             <a:r>
-              <a:t>•  Trust-Led Sampling (MVP): 0-CapEx, 0-CAC trial delivered inside active grocery bags with grocery-linked rewards.</a:t>
-            </a:r>
-          </a:p>
-        </p:txBody>
-      </p:sp>
-      <p:sp>
-        <p:nvSpPr>
-          <p:cNvPr id="6" name="Rounded Rectangle 5"/>
-          <p:cNvSpPr/>
-          <p:nvPr/>
-        </p:nvSpPr>
-        <p:spPr>
-          <a:xfrm>
-            <a:off x="6291072" y="1755648"/>
-            <a:ext cx="5440680" cy="3474720"/>
-          </a:xfrm>
-          <a:prstGeom prst="roundRect">
-            <a:avLst/>
-          </a:prstGeom>
-          <a:solidFill>
-            <a:srgbClr val="1E1430"/>
-          </a:solidFill>
-          <a:ln w="19050">
-            <a:solidFill>
-              <a:srgbClr val="8224E3"/>
-            </a:solidFill>
-          </a:ln>
-        </p:spPr>
-        <p:style>
-          <a:lnRef idx="1">
-            <a:schemeClr val="accent1"/>
-          </a:lnRef>
-          <a:fillRef idx="3">
-            <a:schemeClr val="accent1"/>
-          </a:fillRef>
-          <a:effectRef idx="2">
-            <a:schemeClr val="accent1"/>
-          </a:effectRef>
-          <a:fontRef idx="minor">
-            <a:schemeClr val="lt1"/>
-          </a:fontRef>
-        </p:style>
-        <p:txBody>
-          <a:bodyPr rtlCol="0" anchor="ctr" wrap="square" lIns="164592" tIns="137160" rIns="164592" bIns="137160"/>
-          <a:lstStyle/>
-          <a:p>
-            <a:pPr algn="ctr">
-              <a:spcAft>
-                <a:spcPts val="600"/>
-              </a:spcAft>
-              <a:defRPr sz="1200" b="1">
-                <a:solidFill>
-                  <a:srgbClr val="FFD700"/>
-                </a:solidFill>
-              </a:defRPr>
-            </a:pPr>
-            <a:r>
-              <a:t>🏆 THREE STRATEGIC HORIZONS (RICE MATRIX)</a:t>
+              <a:t>•  Horizon 1 (MVP) — Discovery Pass, B2B Sampler &amp; Category Streak Engine: 0-CapEx bag sampler + monthly streak habit loop. RICE: 210.0 [Illustrative].</a:t>
             </a:r>
           </a:p>
           <a:p>
@@ -9307,7 +9322,7 @@
               </a:defRPr>
             </a:pPr>
             <a:r>
-              <a:t>•  Horizon 1 (MVP) — Discovery Pass &amp; B2B Sampling: Brand-funded trial samples in grocery bags at Rs. 0 [0-CapEx, 0-CAC]. RICE: 210.0 [Illustrative].</a:t>
+              <a:t>•  Horizon 2 (Growth) — QC-Native 10-Min Try-and-Return &amp; Storage Telemetry: Delivery-window inspection + temp IoT sensors. RICE: 180.0 [Illustrative].</a:t>
             </a:r>
           </a:p>
           <a:p>
@@ -9322,22 +9337,7 @@
               </a:defRPr>
             </a:pPr>
             <a:r>
-              <a:t>•  Horizon 2 (Growth) — 15-Min Doorstep Swap &amp; Storage Audit: Reverse logistics rider replacement + dark store temperature telemetry [Operational CapEx]. RICE: 180.0 [Illustrative].</a:t>
-            </a:r>
-          </a:p>
-          <a:p>
-            <a:pPr>
-              <a:spcAft>
-                <a:spcPts val="400"/>
-              </a:spcAft>
-              <a:defRPr sz="950">
-                <a:solidFill>
-                  <a:srgbClr val="E2D9F3"/>
-                </a:solidFill>
-              </a:defRPr>
-            </a:pPr>
-            <a:r>
-              <a:t>•  Horizon 3 (Vision) — Category Quest Loyalty Engine: Multi-category streak board unlocking grocery point multipliers [RICE: 160.0].</a:t>
+              <a:t>•  Horizon 3 (Vision) — Predictive Restock Interception Engine: Cadence-based Amazon interception system [RICE: 160.0].</a:t>
             </a:r>
           </a:p>
         </p:txBody>
@@ -10063,7 +10063,7 @@
               </a:defRPr>
             </a:pPr>
             <a:r>
-              <a:t>  MVP: RECOMMEND, DE-RISK, AND REWARD ADJACENT CATEGORY TRIALS</a:t>
+              <a:t>  DE-RISKED MVP: SAMPLER, QC-NATIVE TRY-RETURN &amp; STREAKS</a:t>
             </a:r>
           </a:p>
         </p:txBody>
@@ -10101,7 +10101,7 @@
               </a:defRPr>
             </a:pPr>
             <a:r>
-              <a:t>7. De-Risked MVP Suite: Integrating AI Recommendations, Trust Cues, and Trial Incentives</a:t>
+              <a:t>7. The Discovery MVP Embeds 0-CAC Sampling, Category Streaks, and 10-Minute Instant Try-and-Return in the Grocery Bag</a:t>
             </a:r>
           </a:p>
           <a:p>
@@ -10113,7 +10113,7 @@
               </a:defRPr>
             </a:pPr>
             <a:r>
-              <a:t>Six built MVP capabilities convert routine grocery checkouts into trusted multi-category exploration.</a:t>
+              <a:t>Combining 0-CAC trial on-ramps with monthly category streak loyalty loops to drive recurring MCER repeat.</a:t>
             </a:r>
           </a:p>
         </p:txBody>
@@ -10185,7 +10185,7 @@
               </a:defRPr>
             </a:pPr>
             <a:r>
-              <a:t>•  1. 🧠 AI Recommendation &amp; Explainability: Recommends adjacent category with clear context ('Because you regularly buy breakfast staples and haven't tried personal care').</a:t>
+              <a:t>•  1. 🧠 AI Recommendation &amp; Explainability: Recommends adjacent category with clear context ('Recommended because you regularly buy breakfast staples and haven't tried personal care').</a:t>
             </a:r>
           </a:p>
           <a:p>
@@ -10200,7 +10200,7 @@
               </a:defRPr>
             </a:pPr>
             <a:r>
-              <a:t>•  2. 💎 0-CAC Trial Sample: Subscribers claim 1 free brand-sponsored sample (Cetaphil, Pedigree) in grocery bag at Rs. 0 [38% survey trigger, 9/24].</a:t>
+              <a:t>•  2. 💎 0-CAC In-Bag Trial Sample: Free brand sample (Cetaphil, Pedigree) inside grocery bag at Rs. 0 [38% survey trigger, 9/24].</a:t>
             </a:r>
           </a:p>
           <a:p>
@@ -10215,7 +10215,7 @@
               </a:defRPr>
             </a:pPr>
             <a:r>
-              <a:t>•  3. 🏷️ Risk Reduction Voucher: Post-trial nudge unlocks Rs. 100 category voucher for full-size items.</a:t>
+              <a:t>•  3. ⚡ QC-Native Instant Try-and-Return: Delivery-window trial/inspection for non-sampleable items (beats Amazon on 10-min reverse logistics).</a:t>
             </a:r>
           </a:p>
         </p:txBody>
@@ -11003,7 +11003,7 @@
               </a:defRPr>
             </a:pPr>
             <a:r>
-              <a:t>8. Lightweight Decision Engine Allocates B2B Samples Without Adding Picking SLA Latency</a:t>
+              <a:t>8. Four-Layer Decision Engine Powers Predictive Restock Nudges and Closed-Loop Brand Attribution</a:t>
             </a:r>
           </a:p>
           <a:p>
@@ -11087,7 +11087,7 @@
               </a:defRPr>
             </a:pPr>
             <a:r>
-              <a:t>•  Layer 1 (Client UI): Mobile Cart UI, B2B Sampler Carousel, Streak Board, SkinMatch Viewfinder.</a:t>
+              <a:t>•  Layer 1 (Client UI): Mobile Cart UI, B2B Sampler Carousel, Category Streak Board, SkinMatch Viewfinder.</a:t>
             </a:r>
           </a:p>
           <a:p>
@@ -11132,7 +11132,7 @@
               </a:defRPr>
             </a:pPr>
             <a:r>
-              <a:t>•  Layer 4 (B2B Marketplace Portal): Brand sample inventory ledger tracking sample distribution and conversion rates.</a:t>
+              <a:t>•  Layer 4 (B2B Marketplace Portal): Brand sample inventory ledger tracking sample-to-full-size conversion rates for FMCG brands.</a:t>
             </a:r>
           </a:p>
         </p:txBody>
@@ -11975,7 +11975,7 @@
               </a:defRPr>
             </a:pPr>
             <a:r>
-              <a:t>  EVERY METRIC IS TIED TO THE NORTH STAR: MONTHLY CATEGORY EXPLORATION RATE (MCER).</a:t>
+              <a:t>  INCREMENTAL LIFT VIA RANDOMIZED HOLDOUT GROUPS</a:t>
             </a:r>
           </a:p>
         </p:txBody>
@@ -12013,7 +12013,7 @@
               </a:defRPr>
             </a:pPr>
             <a:r>
-              <a:t>9. Success Is Measured by Monthly Category Exploration Rate (MCER) &amp; De-Risked Conversion</a:t>
+              <a:t>9. MCER Growth (8.2% -&gt; 28.4%) Is Validated via Randomized Holdout Groups and SLA Guardrails</a:t>
             </a:r>
           </a:p>
           <a:p>
@@ -12025,7 +12025,7 @@
               </a:defRPr>
             </a:pPr>
             <a:r>
-              <a:t>North Star metric supported by leading indicators, conversion funnels, and SLA guardrails.</a:t>
+              <a:t>Measuring true incremental lift via control groups rather than raw attach proxies.</a:t>
             </a:r>
           </a:p>
         </p:txBody>
@@ -12082,7 +12082,7 @@
               </a:defRPr>
             </a:pPr>
             <a:r>
-              <a:t>⭐ NORTH STAR &amp; LEADING INDICATORS</a:t>
+              <a:t>⭐ NORTH STAR &amp; INCREMENTALITY FRAMEWORK</a:t>
             </a:r>
           </a:p>
           <a:p>
@@ -12127,7 +12127,22 @@
               </a:defRPr>
             </a:pPr>
             <a:r>
-              <a:t>•  Leading Indicators: Sample attach rate to grocery carts (target &gt;35%), Trust-cue interaction CTR, Sample-to-full-size conversion (target 12% in 14 days), % users redeeming grocery-linked point streak.</a:t>
+              <a:t>•  Randomized Holdout Control: 10% control group (no sample/nudge) vs treatment to measure true incremental causal lift.</a:t>
+            </a:r>
+          </a:p>
+          <a:p>
+            <a:pPr>
+              <a:spcAft>
+                <a:spcPts val="400"/>
+              </a:spcAft>
+              <a:defRPr sz="950">
+                <a:solidFill>
+                  <a:srgbClr val="E2D9F3"/>
+                </a:solidFill>
+              </a:defRPr>
+            </a:pPr>
+            <a:r>
+              <a:t>•  Leading Indicators: Sample attach rate (&gt;35%), Sample-to-full-size conversion (12% in 14 days), Category streak completion rate.</a:t>
             </a:r>
           </a:p>
         </p:txBody>
